--- a/tutor-time/bystander-to-upstander/downloads/Bystander_to_Upstander.pptx
+++ b/tutor-time/bystander-to-upstander/downloads/Bystander_to_Upstander.pptx
@@ -7642,7 +7642,7 @@
                 </a:solidFill>
                 <a:latin typeface="Karla"/>
               </a:rPr>
-              <a:t>Move your sheet two tables along. Tick what it passes, then write one change that would get it said.</a:t>
+              <a:t>Move your sheet two tables along. Tick what it passes, write one change that would get it said, then send it back.</a:t>
             </a:r>
           </a:p>
         </p:txBody>
@@ -8784,7 +8784,7 @@
                 </a:solidFill>
                 <a:latin typeface="Karla"/>
               </a:rPr>
-              <a:t>This is not collected and it is not read out. Fold it, keep it, or bin it on the way out.</a:t>
+              <a:t>Write it on your sheet. Nobody collects it, so keep it or bin it on the way out.</a:t>
             </a:r>
           </a:p>
         </p:txBody>
@@ -11450,7 +11450,7 @@
                 </a:solidFill>
                 <a:latin typeface="Libre Caslon Display"/>
               </a:rPr>
-              <a:t>Kai laughs, then says it again to a different group at lunch.</a:t>
+              <a:t>Later, Kai hears it, laughs, and says it again to a different group at lunch.</a:t>
             </a:r>
             <a:br/>
             <a:r>
@@ -14690,7 +14690,7 @@
                 </a:solidFill>
                 <a:latin typeface="Karla"/>
               </a:rPr>
-              <a:t>The biggest group is the third one. The roles are not fixed, and most people are a different one on a different day.</a:t>
+              <a:t>The biggest groups are the third and fourth ones. The roles are not fixed, and most people are a different one on a different day.</a:t>
             </a:r>
           </a:p>
         </p:txBody>
@@ -15124,7 +15124,7 @@
                 </a:solidFill>
                 <a:latin typeface="Karla"/>
               </a:rPr>
-              <a:t>Researchers asked a whole year group who did what when somebody was picked on. Almost everybody held a role. The biggest group was not the one who started it: it was the one that laughed, joined in from the side, or was simply there as an audience.</a:t>
+              <a:t>Researchers asked a whole year group who did what when somebody was picked on. Almost everybody held a role. The biggest group was not the one who started it. It was the people who laughed along, or who were simply there and said nothing.</a:t>
             </a:r>
           </a:p>
         </p:txBody>
@@ -15164,7 +15164,7 @@
                 </a:solidFill>
                 <a:latin typeface="Karla"/>
               </a:rPr>
-              <a:t>That study is thirty years old and it was another country. The roles have held up since.</a:t>
+              <a:t>That study is thirty years old and from another country. The roles have held up since.</a:t>
             </a:r>
           </a:p>
         </p:txBody>

--- a/tutor-time/bystander-to-upstander/downloads/Bystander_to_Upstander.pptx
+++ b/tutor-time/bystander-to-upstander/downloads/Bystander_to_Upstander.pptx
@@ -3198,11 +3198,11 @@
           <a:p>
             <a:pPr algn="ctr"/>
             <a:r>
-              <a:rPr sz="3600" b="1">
+              <a:rPr sz="3600" b="0">
                 <a:solidFill>
                   <a:srgbClr val="6B4F3E"/>
                 </a:solidFill>
-                <a:latin typeface="Libre Caslon Display"/>
+                <a:latin typeface="Georgia"/>
               </a:rPr>
               <a:t>Bystander to Upstander</a:t>
             </a:r>
@@ -3286,7 +3286,7 @@
                 <a:solidFill>
                   <a:srgbClr val="706962"/>
                 </a:solidFill>
-                <a:latin typeface="Karla"/>
+                <a:latin typeface="Calibri"/>
               </a:rPr>
               <a:t>Most of the people in a moment like this think they are not in it.</a:t>
             </a:r>
@@ -3322,7 +3322,7 @@
                 <a:solidFill>
                   <a:srgbClr val="AAA49D"/>
                 </a:solidFill>
-                <a:latin typeface="Karla"/>
+                <a:latin typeface="Calibri"/>
               </a:rPr>
               <a:t>One lesson</a:t>
             </a:r>
@@ -3382,7 +3382,7 @@
                 <a:solidFill>
                   <a:srgbClr val="AAA49D"/>
                 </a:solidFill>
-                <a:latin typeface="Karla"/>
+                <a:latin typeface="Calibri"/>
               </a:rPr>
               <a:t>The Pastoral Guide</a:t>
             </a:r>
@@ -3418,7 +3418,7 @@
                 <a:solidFill>
                   <a:srgbClr val="AAA49D"/>
                 </a:solidFill>
-                <a:latin typeface="Karla"/>
+                <a:latin typeface="Calibri"/>
               </a:rPr>
               <a:t>1 / 18</a:t>
             </a:r>
@@ -3516,91 +3516,9 @@
                 <a:solidFill>
                   <a:srgbClr val="A3897A"/>
                 </a:solidFill>
-                <a:latin typeface="Karla"/>
+                <a:latin typeface="Calibri"/>
               </a:rPr>
               <a:t>WATCH THIS FIRST</a:t>
-            </a:r>
-          </a:p>
-        </p:txBody>
-      </p:sp>
-      <p:sp>
-        <p:nvSpPr>
-          <p:cNvPr id="4" name="Rounded Rectangle 3"/>
-          <p:cNvSpPr/>
-          <p:nvPr/>
-        </p:nvSpPr>
-        <p:spPr>
-          <a:xfrm>
-            <a:off x="7543800" y="530352"/>
-            <a:ext cx="914400" cy="347472"/>
-          </a:xfrm>
-          <a:prstGeom prst="roundRect">
-            <a:avLst>
-              <a:gd name="adj" fmla="val 50000"/>
-            </a:avLst>
-          </a:prstGeom>
-          <a:solidFill>
-            <a:srgbClr val="F0EAE3"/>
-          </a:solidFill>
-          <a:ln>
-            <a:noFill/>
-          </a:ln>
-          <a:effectLst/>
-        </p:spPr>
-        <p:style>
-          <a:lnRef idx="1">
-            <a:schemeClr val="accent1"/>
-          </a:lnRef>
-          <a:fillRef idx="3">
-            <a:schemeClr val="accent1"/>
-          </a:fillRef>
-          <a:effectRef idx="2">
-            <a:schemeClr val="accent1"/>
-          </a:effectRef>
-          <a:fontRef idx="minor">
-            <a:schemeClr val="lt1"/>
-          </a:fontRef>
-        </p:style>
-        <p:txBody>
-          <a:bodyPr rtlCol="0" anchor="ctr"/>
-          <a:lstStyle/>
-          <a:p>
-            <a:pPr algn="ctr"/>
-          </a:p>
-        </p:txBody>
-      </p:sp>
-      <p:sp>
-        <p:nvSpPr>
-          <p:cNvPr id="5" name="TextBox 4"/>
-          <p:cNvSpPr txBox="1"/>
-          <p:nvPr/>
-        </p:nvSpPr>
-        <p:spPr>
-          <a:xfrm>
-            <a:off x="7543800" y="594360"/>
-            <a:ext cx="914400" cy="237744"/>
-          </a:xfrm>
-          <a:prstGeom prst="rect">
-            <a:avLst/>
-          </a:prstGeom>
-          <a:noFill/>
-          <a:effectLst/>
-        </p:spPr>
-        <p:txBody>
-          <a:bodyPr wrap="square" lIns="0" rIns="0" tIns="0" bIns="0" anchor="t">
-            <a:spAutoFit/>
-          </a:bodyPr>
-          <a:lstStyle/>
-          <a:p>
-            <a:pPr algn="ctr"/>
-            <a:r>
-              <a:rPr sz="1000" b="1" spc="100">
-                <a:solidFill>
-                  <a:srgbClr val="6B4F3E"/>
-                </a:solidFill>
-                <a:latin typeface="Karla"/>
-              </a:rPr>
-              <a:t>MODEL</a:t>
             </a:r>
           </a:p>
         </p:txBody>
@@ -3630,11 +3548,11 @@
           <a:p>
             <a:pPr algn="l"/>
             <a:r>
-              <a:rPr sz="3100" b="1">
+              <a:rPr sz="3100" b="0">
                 <a:solidFill>
                   <a:srgbClr val="3A332E"/>
                 </a:solidFill>
-                <a:latin typeface="Libre Caslon Display"/>
+                <a:latin typeface="Georgia"/>
               </a:rPr>
               <a:t>Two ways of stepping in</a:t>
             </a:r>
@@ -3712,11 +3630,11 @@
           <a:p>
             <a:pPr algn="ctr"/>
             <a:r>
-              <a:rPr sz="1600" b="1">
+              <a:rPr sz="1600" b="0">
                 <a:solidFill>
                   <a:srgbClr val="6B4F3E"/>
                 </a:solidFill>
-                <a:latin typeface="Libre Caslon Display"/>
+                <a:latin typeface="Georgia"/>
               </a:rPr>
               <a:t>This one works</a:t>
             </a:r>
@@ -3756,7 +3674,7 @@
                 <a:solidFill>
                   <a:srgbClr val="3A332E"/>
                 </a:solidFill>
-                <a:latin typeface="Libre Caslon Display"/>
+                <a:latin typeface="Georgia"/>
               </a:rPr>
               <a:t>“That is not funny any more.”</a:t>
             </a:r>
@@ -3796,7 +3714,7 @@
                 <a:solidFill>
                   <a:srgbClr val="706962"/>
                 </a:solidFill>
-                <a:latin typeface="Karla"/>
+                <a:latin typeface="Calibri"/>
               </a:rPr>
               <a:t>Said flatly, then straight on to something else.</a:t>
             </a:r>
@@ -3874,11 +3792,11 @@
           <a:p>
             <a:pPr algn="ctr"/>
             <a:r>
-              <a:rPr sz="1600" b="1">
+              <a:rPr sz="1600" b="0">
                 <a:solidFill>
                   <a:srgbClr val="6B4F3E"/>
                 </a:solidFill>
-                <a:latin typeface="Libre Caslon Display"/>
+                <a:latin typeface="Georgia"/>
               </a:rPr>
               <a:t>This one backfires</a:t>
             </a:r>
@@ -3918,7 +3836,7 @@
                 <a:solidFill>
                   <a:srgbClr val="3A332E"/>
                 </a:solidFill>
-                <a:latin typeface="Libre Caslon Display"/>
+                <a:latin typeface="Georgia"/>
               </a:rPr>
               <a:t>“You are such a bully.”</a:t>
             </a:r>
@@ -3958,7 +3876,7 @@
                 <a:solidFill>
                   <a:srgbClr val="706962"/>
                 </a:solidFill>
-                <a:latin typeface="Karla"/>
+                <a:latin typeface="Calibri"/>
               </a:rPr>
               <a:t>Puts somebody on trial in front of the audience.</a:t>
             </a:r>
@@ -3998,7 +3916,7 @@
                 <a:solidFill>
                   <a:srgbClr val="706962"/>
                 </a:solidFill>
-                <a:latin typeface="Karla"/>
+                <a:latin typeface="Calibri"/>
               </a:rPr>
               <a:t>The second one sounds braver, and it does not work. The audience defends the joke.</a:t>
             </a:r>
@@ -4038,7 +3956,7 @@
                 <a:solidFill>
                   <a:srgbClr val="6B4F3E"/>
                 </a:solidFill>
-                <a:latin typeface="Karla"/>
+                <a:latin typeface="Calibri"/>
               </a:rPr>
               <a:t>What you are trying to do is end the audience, not win an argument.</a:t>
             </a:r>
@@ -4098,7 +4016,7 @@
                 <a:solidFill>
                   <a:srgbClr val="AAA49D"/>
                 </a:solidFill>
-                <a:latin typeface="Karla"/>
+                <a:latin typeface="Calibri"/>
               </a:rPr>
               <a:t>The Pastoral Guide</a:t>
             </a:r>
@@ -4134,7 +4052,7 @@
                 <a:solidFill>
                   <a:srgbClr val="AAA49D"/>
                 </a:solidFill>
-                <a:latin typeface="Karla"/>
+                <a:latin typeface="Calibri"/>
               </a:rPr>
               <a:t>10 / 18</a:t>
             </a:r>
@@ -4232,91 +4150,9 @@
                 <a:solidFill>
                   <a:srgbClr val="A3897A"/>
                 </a:solidFill>
-                <a:latin typeface="Karla"/>
+                <a:latin typeface="Calibri"/>
               </a:rPr>
               <a:t>WHAT YOU CAN ACTUALLY DO</a:t>
-            </a:r>
-          </a:p>
-        </p:txBody>
-      </p:sp>
-      <p:sp>
-        <p:nvSpPr>
-          <p:cNvPr id="4" name="Rounded Rectangle 3"/>
-          <p:cNvSpPr/>
-          <p:nvPr/>
-        </p:nvSpPr>
-        <p:spPr>
-          <a:xfrm>
-            <a:off x="7543800" y="530352"/>
-            <a:ext cx="914400" cy="347472"/>
-          </a:xfrm>
-          <a:prstGeom prst="roundRect">
-            <a:avLst>
-              <a:gd name="adj" fmla="val 50000"/>
-            </a:avLst>
-          </a:prstGeom>
-          <a:solidFill>
-            <a:srgbClr val="F0EAE3"/>
-          </a:solidFill>
-          <a:ln>
-            <a:noFill/>
-          </a:ln>
-          <a:effectLst/>
-        </p:spPr>
-        <p:style>
-          <a:lnRef idx="1">
-            <a:schemeClr val="accent1"/>
-          </a:lnRef>
-          <a:fillRef idx="3">
-            <a:schemeClr val="accent1"/>
-          </a:fillRef>
-          <a:effectRef idx="2">
-            <a:schemeClr val="accent1"/>
-          </a:effectRef>
-          <a:fontRef idx="minor">
-            <a:schemeClr val="lt1"/>
-          </a:fontRef>
-        </p:style>
-        <p:txBody>
-          <a:bodyPr rtlCol="0" anchor="ctr"/>
-          <a:lstStyle/>
-          <a:p>
-            <a:pPr algn="ctr"/>
-          </a:p>
-        </p:txBody>
-      </p:sp>
-      <p:sp>
-        <p:nvSpPr>
-          <p:cNvPr id="5" name="TextBox 4"/>
-          <p:cNvSpPr txBox="1"/>
-          <p:nvPr/>
-        </p:nvSpPr>
-        <p:spPr>
-          <a:xfrm>
-            <a:off x="7543800" y="594360"/>
-            <a:ext cx="914400" cy="237744"/>
-          </a:xfrm>
-          <a:prstGeom prst="rect">
-            <a:avLst/>
-          </a:prstGeom>
-          <a:noFill/>
-          <a:effectLst/>
-        </p:spPr>
-        <p:txBody>
-          <a:bodyPr wrap="square" lIns="0" rIns="0" tIns="0" bIns="0" anchor="t">
-            <a:spAutoFit/>
-          </a:bodyPr>
-          <a:lstStyle/>
-          <a:p>
-            <a:pPr algn="ctr"/>
-            <a:r>
-              <a:rPr sz="1000" b="1" spc="100">
-                <a:solidFill>
-                  <a:srgbClr val="6B4F3E"/>
-                </a:solidFill>
-                <a:latin typeface="Karla"/>
-              </a:rPr>
-              <a:t>TEACH</a:t>
             </a:r>
           </a:p>
         </p:txBody>
@@ -4346,11 +4182,11 @@
           <a:p>
             <a:pPr algn="l"/>
             <a:r>
-              <a:rPr sz="3100" b="1">
+              <a:rPr sz="3100" b="0">
                 <a:solidFill>
                   <a:srgbClr val="3A332E"/>
                 </a:solidFill>
-                <a:latin typeface="Libre Caslon Display"/>
+                <a:latin typeface="Georgia"/>
               </a:rPr>
               <a:t>Three ways out</a:t>
             </a:r>
@@ -4472,11 +4308,11 @@
           <a:p>
             <a:pPr algn="ctr"/>
             <a:r>
-              <a:rPr sz="1800" b="1">
+              <a:rPr sz="1800" b="0">
                 <a:solidFill>
                   <a:srgbClr val="FFFDF7"/>
                 </a:solidFill>
-                <a:latin typeface="Libre Caslon Display"/>
+                <a:latin typeface="Georgia"/>
               </a:rPr>
               <a:t>1</a:t>
             </a:r>
@@ -4512,11 +4348,11 @@
               </a:lnSpc>
             </a:pPr>
             <a:r>
-              <a:rPr sz="1500" b="1">
+              <a:rPr sz="1500" b="0">
                 <a:solidFill>
                   <a:srgbClr val="6B4F3E"/>
                 </a:solidFill>
-                <a:latin typeface="Libre Caslon Display"/>
+                <a:latin typeface="Georgia"/>
               </a:rPr>
               <a:t>Do not laugh</a:t>
             </a:r>
@@ -4556,7 +4392,7 @@
                 <a:solidFill>
                   <a:srgbClr val="706962"/>
                 </a:solidFill>
-                <a:latin typeface="Karla"/>
+                <a:latin typeface="Calibri"/>
               </a:rPr>
               <a:t>A joke with no audience runs out.</a:t>
             </a:r>
@@ -4678,11 +4514,11 @@
           <a:p>
             <a:pPr algn="ctr"/>
             <a:r>
-              <a:rPr sz="1800" b="1">
+              <a:rPr sz="1800" b="0">
                 <a:solidFill>
                   <a:srgbClr val="FFFDF7"/>
                 </a:solidFill>
-                <a:latin typeface="Libre Caslon Display"/>
+                <a:latin typeface="Georgia"/>
               </a:rPr>
               <a:t>2</a:t>
             </a:r>
@@ -4718,11 +4554,11 @@
               </a:lnSpc>
             </a:pPr>
             <a:r>
-              <a:rPr sz="1500" b="1">
+              <a:rPr sz="1500" b="0">
                 <a:solidFill>
                   <a:srgbClr val="6B4F3E"/>
                 </a:solidFill>
-                <a:latin typeface="Libre Caslon Display"/>
+                <a:latin typeface="Georgia"/>
               </a:rPr>
               <a:t>Move it on</a:t>
             </a:r>
@@ -4762,7 +4598,7 @@
                 <a:solidFill>
                   <a:srgbClr val="706962"/>
                 </a:solidFill>
-                <a:latin typeface="Karla"/>
+                <a:latin typeface="Calibri"/>
               </a:rPr>
               <a:t>Change the subject. Give everyone something else to do.</a:t>
             </a:r>
@@ -4884,11 +4720,11 @@
           <a:p>
             <a:pPr algn="ctr"/>
             <a:r>
-              <a:rPr sz="1800" b="1">
+              <a:rPr sz="1800" b="0">
                 <a:solidFill>
                   <a:srgbClr val="FFFDF7"/>
                 </a:solidFill>
-                <a:latin typeface="Libre Caslon Display"/>
+                <a:latin typeface="Georgia"/>
               </a:rPr>
               <a:t>3</a:t>
             </a:r>
@@ -4924,11 +4760,11 @@
               </a:lnSpc>
             </a:pPr>
             <a:r>
-              <a:rPr sz="1500" b="1">
+              <a:rPr sz="1500" b="0">
                 <a:solidFill>
                   <a:srgbClr val="6B4F3E"/>
                 </a:solidFill>
-                <a:latin typeface="Libre Caslon Display"/>
+                <a:latin typeface="Georgia"/>
               </a:rPr>
               <a:t>Say something after</a:t>
             </a:r>
@@ -4968,7 +4804,7 @@
                 <a:solidFill>
                   <a:srgbClr val="706962"/>
                 </a:solidFill>
-                <a:latin typeface="Karla"/>
+                <a:latin typeface="Calibri"/>
               </a:rPr>
               <a:t>Find the person later. One sentence is enough.</a:t>
             </a:r>
@@ -5008,7 +4844,7 @@
                 <a:solidFill>
                   <a:srgbClr val="706962"/>
                 </a:solidFill>
-                <a:latin typeface="Karla"/>
+                <a:latin typeface="Calibri"/>
               </a:rPr>
               <a:t>One of these is silent, and none of them needs you to be brave in front of everyone.</a:t>
             </a:r>
@@ -5068,7 +4904,7 @@
                 <a:solidFill>
                   <a:srgbClr val="AAA49D"/>
                 </a:solidFill>
-                <a:latin typeface="Karla"/>
+                <a:latin typeface="Calibri"/>
               </a:rPr>
               <a:t>The Pastoral Guide</a:t>
             </a:r>
@@ -5104,7 +4940,7 @@
                 <a:solidFill>
                   <a:srgbClr val="AAA49D"/>
                 </a:solidFill>
-                <a:latin typeface="Karla"/>
+                <a:latin typeface="Calibri"/>
               </a:rPr>
               <a:t>11 / 18</a:t>
             </a:r>
@@ -5202,7 +5038,7 @@
                 <a:solidFill>
                   <a:srgbClr val="A3897A"/>
                 </a:solidFill>
-                <a:latin typeface="Karla"/>
+                <a:latin typeface="Calibri"/>
               </a:rPr>
               <a:t>NOW ONE OUT LOUD</a:t>
             </a:r>
@@ -5211,18 +5047,136 @@
       </p:sp>
       <p:sp>
         <p:nvSpPr>
-          <p:cNvPr id="4" name="Rounded Rectangle 3"/>
+          <p:cNvPr id="6" name="TextBox 5"/>
+          <p:cNvSpPr txBox="1"/>
+          <p:nvPr/>
+        </p:nvSpPr>
+        <p:spPr>
+          <a:xfrm>
+            <a:off x="685800" y="841248"/>
+            <a:ext cx="6309360" cy="566928"/>
+          </a:xfrm>
+          <a:prstGeom prst="rect">
+            <a:avLst/>
+          </a:prstGeom>
+          <a:noFill/>
+          <a:effectLst/>
+        </p:spPr>
+        <p:txBody>
+          <a:bodyPr wrap="square" lIns="0" rIns="0" tIns="0" bIns="0" anchor="t">
+            <a:spAutoFit/>
+          </a:bodyPr>
+          <a:lstStyle/>
+          <a:p>
+            <a:pPr algn="l"/>
+            <a:r>
+              <a:rPr sz="3100" b="0">
+                <a:solidFill>
+                  <a:srgbClr val="3A332E"/>
+                </a:solidFill>
+                <a:latin typeface="Georgia"/>
+              </a:rPr>
+              <a:t>Try it on this one</a:t>
+            </a:r>
+          </a:p>
+        </p:txBody>
+      </p:sp>
+      <p:sp>
+        <p:nvSpPr>
+          <p:cNvPr id="7" name="Rounded Rectangle 6"/>
           <p:cNvSpPr/>
           <p:nvPr/>
         </p:nvSpPr>
         <p:spPr>
           <a:xfrm>
-            <a:off x="7543800" y="530352"/>
-            <a:ext cx="914400" cy="347472"/>
+            <a:off x="685800" y="1481328"/>
+            <a:ext cx="7772400" cy="548640"/>
           </a:xfrm>
           <a:prstGeom prst="roundRect">
             <a:avLst>
-              <a:gd name="adj" fmla="val 50000"/>
+              <a:gd name="adj" fmla="val 15000"/>
+            </a:avLst>
+          </a:prstGeom>
+          <a:solidFill>
+            <a:srgbClr val="FFFDF7"/>
+          </a:solidFill>
+          <a:ln>
+            <a:noFill/>
+          </a:ln>
+          <a:effectLst/>
+        </p:spPr>
+        <p:style>
+          <a:lnRef idx="1">
+            <a:schemeClr val="accent1"/>
+          </a:lnRef>
+          <a:fillRef idx="3">
+            <a:schemeClr val="accent1"/>
+          </a:fillRef>
+          <a:effectRef idx="2">
+            <a:schemeClr val="accent1"/>
+          </a:effectRef>
+          <a:fontRef idx="minor">
+            <a:schemeClr val="lt1"/>
+          </a:fontRef>
+        </p:style>
+        <p:txBody>
+          <a:bodyPr rtlCol="0" anchor="ctr"/>
+          <a:lstStyle/>
+          <a:p>
+            <a:pPr algn="ctr"/>
+          </a:p>
+        </p:txBody>
+      </p:sp>
+      <p:sp>
+        <p:nvSpPr>
+          <p:cNvPr id="8" name="TextBox 7"/>
+          <p:cNvSpPr txBox="1"/>
+          <p:nvPr/>
+        </p:nvSpPr>
+        <p:spPr>
+          <a:xfrm>
+            <a:off x="1051560" y="1627632"/>
+            <a:ext cx="7040880" cy="310896"/>
+          </a:xfrm>
+          <a:prstGeom prst="rect">
+            <a:avLst/>
+          </a:prstGeom>
+          <a:noFill/>
+          <a:effectLst/>
+        </p:spPr>
+        <p:txBody>
+          <a:bodyPr wrap="square" lIns="0" rIns="0" tIns="0" bIns="0" anchor="t">
+            <a:spAutoFit/>
+          </a:bodyPr>
+          <a:lstStyle/>
+          <a:p>
+            <a:pPr algn="l"/>
+            <a:r>
+              <a:rPr sz="1300" b="0">
+                <a:solidFill>
+                  <a:srgbClr val="3A332E"/>
+                </a:solidFill>
+                <a:latin typeface="Georgia"/>
+              </a:rPr>
+              <a:t>Somebody at your table does an impression of a classmate, and everyone laughs.</a:t>
+            </a:r>
+          </a:p>
+        </p:txBody>
+      </p:sp>
+      <p:sp>
+        <p:nvSpPr>
+          <p:cNvPr id="9" name="Rounded Rectangle 8"/>
+          <p:cNvSpPr/>
+          <p:nvPr/>
+        </p:nvSpPr>
+        <p:spPr>
+          <a:xfrm>
+            <a:off x="685800" y="2194560"/>
+            <a:ext cx="7772400" cy="640080"/>
+          </a:xfrm>
+          <a:prstGeom prst="roundRect">
+            <a:avLst>
+              <a:gd name="adj" fmla="val 12857"/>
             </a:avLst>
           </a:prstGeom>
           <a:solidFill>
@@ -5257,94 +5211,20 @@
       </p:sp>
       <p:sp>
         <p:nvSpPr>
-          <p:cNvPr id="5" name="TextBox 4"/>
-          <p:cNvSpPr txBox="1"/>
-          <p:nvPr/>
-        </p:nvSpPr>
-        <p:spPr>
-          <a:xfrm>
-            <a:off x="7543800" y="594360"/>
-            <a:ext cx="914400" cy="237744"/>
-          </a:xfrm>
-          <a:prstGeom prst="rect">
-            <a:avLst/>
-          </a:prstGeom>
-          <a:noFill/>
-          <a:effectLst/>
-        </p:spPr>
-        <p:txBody>
-          <a:bodyPr wrap="square" lIns="0" rIns="0" tIns="0" bIns="0" anchor="t">
-            <a:spAutoFit/>
-          </a:bodyPr>
-          <a:lstStyle/>
-          <a:p>
-            <a:pPr algn="ctr"/>
-            <a:r>
-              <a:rPr sz="1000" b="1" spc="100">
-                <a:solidFill>
-                  <a:srgbClr val="6B4F3E"/>
-                </a:solidFill>
-                <a:latin typeface="Karla"/>
-              </a:rPr>
-              <a:t>TOGETHER</a:t>
-            </a:r>
-          </a:p>
-        </p:txBody>
-      </p:sp>
-      <p:sp>
-        <p:nvSpPr>
-          <p:cNvPr id="6" name="TextBox 5"/>
-          <p:cNvSpPr txBox="1"/>
-          <p:nvPr/>
-        </p:nvSpPr>
-        <p:spPr>
-          <a:xfrm>
-            <a:off x="685800" y="841248"/>
-            <a:ext cx="6309360" cy="566928"/>
-          </a:xfrm>
-          <a:prstGeom prst="rect">
-            <a:avLst/>
-          </a:prstGeom>
-          <a:noFill/>
-          <a:effectLst/>
-        </p:spPr>
-        <p:txBody>
-          <a:bodyPr wrap="square" lIns="0" rIns="0" tIns="0" bIns="0" anchor="t">
-            <a:spAutoFit/>
-          </a:bodyPr>
-          <a:lstStyle/>
-          <a:p>
-            <a:pPr algn="l"/>
-            <a:r>
-              <a:rPr sz="3100" b="1">
-                <a:solidFill>
-                  <a:srgbClr val="3A332E"/>
-                </a:solidFill>
-                <a:latin typeface="Libre Caslon Display"/>
-              </a:rPr>
-              <a:t>Try it on this one</a:t>
-            </a:r>
-          </a:p>
-        </p:txBody>
-      </p:sp>
-      <p:sp>
-        <p:nvSpPr>
-          <p:cNvPr id="7" name="Rounded Rectangle 6"/>
+          <p:cNvPr id="10" name="Oval 9"/>
           <p:cNvSpPr/>
           <p:nvPr/>
         </p:nvSpPr>
         <p:spPr>
           <a:xfrm>
-            <a:off x="685800" y="1481328"/>
-            <a:ext cx="7772400" cy="548640"/>
-          </a:xfrm>
-          <a:prstGeom prst="roundRect">
-            <a:avLst>
-              <a:gd name="adj" fmla="val 15000"/>
-            </a:avLst>
+            <a:off x="941832" y="2313432"/>
+            <a:ext cx="402336" cy="402336"/>
+          </a:xfrm>
+          <a:prstGeom prst="ellipse">
+            <a:avLst/>
           </a:prstGeom>
           <a:solidFill>
-            <a:srgbClr val="FFFDF7"/>
+            <a:srgbClr val="6B4F3E"/>
           </a:solidFill>
           <a:ln>
             <a:noFill/>
@@ -5375,49 +5255,89 @@
       </p:sp>
       <p:sp>
         <p:nvSpPr>
-          <p:cNvPr id="8" name="TextBox 7"/>
-          <p:cNvSpPr txBox="1"/>
-          <p:nvPr/>
-        </p:nvSpPr>
-        <p:spPr>
-          <a:xfrm>
-            <a:off x="1051560" y="1627632"/>
-            <a:ext cx="7040880" cy="310896"/>
-          </a:xfrm>
-          <a:prstGeom prst="rect">
-            <a:avLst/>
-          </a:prstGeom>
-          <a:noFill/>
-          <a:effectLst/>
-        </p:spPr>
-        <p:txBody>
-          <a:bodyPr wrap="square" lIns="0" rIns="0" tIns="0" bIns="0" anchor="t">
-            <a:spAutoFit/>
-          </a:bodyPr>
-          <a:lstStyle/>
-          <a:p>
-            <a:pPr algn="l"/>
-            <a:r>
-              <a:rPr sz="1300" b="0">
-                <a:solidFill>
-                  <a:srgbClr val="3A332E"/>
-                </a:solidFill>
-                <a:latin typeface="Libre Caslon Display"/>
-              </a:rPr>
-              <a:t>Somebody at your table does an impression of a classmate, and everyone laughs.</a:t>
-            </a:r>
-          </a:p>
-        </p:txBody>
-      </p:sp>
-      <p:sp>
-        <p:nvSpPr>
-          <p:cNvPr id="9" name="Rounded Rectangle 8"/>
+          <p:cNvPr id="11" name="TextBox 10"/>
+          <p:cNvSpPr txBox="1"/>
+          <p:nvPr/>
+        </p:nvSpPr>
+        <p:spPr>
+          <a:xfrm>
+            <a:off x="941832" y="2414015"/>
+            <a:ext cx="402336" cy="402336"/>
+          </a:xfrm>
+          <a:prstGeom prst="rect">
+            <a:avLst/>
+          </a:prstGeom>
+          <a:noFill/>
+          <a:effectLst/>
+        </p:spPr>
+        <p:txBody>
+          <a:bodyPr wrap="square" lIns="0" rIns="0" tIns="0" bIns="0" anchor="t">
+            <a:spAutoFit/>
+          </a:bodyPr>
+          <a:lstStyle/>
+          <a:p>
+            <a:pPr algn="ctr"/>
+            <a:r>
+              <a:rPr sz="1400" b="0">
+                <a:solidFill>
+                  <a:srgbClr val="FFFDF7"/>
+                </a:solidFill>
+                <a:latin typeface="Georgia"/>
+              </a:rPr>
+              <a:t>1</a:t>
+            </a:r>
+          </a:p>
+        </p:txBody>
+      </p:sp>
+      <p:sp>
+        <p:nvSpPr>
+          <p:cNvPr id="12" name="TextBox 11"/>
+          <p:cNvSpPr txBox="1"/>
+          <p:nvPr/>
+        </p:nvSpPr>
+        <p:spPr>
+          <a:xfrm>
+            <a:off x="1572768" y="2340864"/>
+            <a:ext cx="6583680" cy="457200"/>
+          </a:xfrm>
+          <a:prstGeom prst="rect">
+            <a:avLst/>
+          </a:prstGeom>
+          <a:noFill/>
+          <a:effectLst/>
+        </p:spPr>
+        <p:txBody>
+          <a:bodyPr wrap="square" lIns="0" rIns="0" tIns="0" bIns="0" anchor="ctr">
+            <a:spAutoFit/>
+          </a:bodyPr>
+          <a:lstStyle/>
+          <a:p>
+            <a:pPr algn="l">
+              <a:lnSpc>
+                <a:spcPct val="110000"/>
+              </a:lnSpc>
+            </a:pPr>
+            <a:r>
+              <a:rPr sz="1400" b="0">
+                <a:solidFill>
+                  <a:srgbClr val="6B4F3E"/>
+                </a:solidFill>
+                <a:latin typeface="Georgia"/>
+              </a:rPr>
+              <a:t>What would you actually say?</a:t>
+            </a:r>
+          </a:p>
+        </p:txBody>
+      </p:sp>
+      <p:sp>
+        <p:nvSpPr>
+          <p:cNvPr id="13" name="Rounded Rectangle 12"/>
           <p:cNvSpPr/>
           <p:nvPr/>
         </p:nvSpPr>
         <p:spPr>
           <a:xfrm>
-            <a:off x="685800" y="2194560"/>
+            <a:off x="685800" y="2907791"/>
             <a:ext cx="7772400" cy="640080"/>
           </a:xfrm>
           <a:prstGeom prst="roundRect">
@@ -5457,13 +5377,13 @@
       </p:sp>
       <p:sp>
         <p:nvSpPr>
-          <p:cNvPr id="10" name="Oval 9"/>
+          <p:cNvPr id="14" name="Oval 13"/>
           <p:cNvSpPr/>
           <p:nvPr/>
         </p:nvSpPr>
         <p:spPr>
           <a:xfrm>
-            <a:off x="941832" y="2313432"/>
+            <a:off x="941832" y="3026663"/>
             <a:ext cx="402336" cy="402336"/>
           </a:xfrm>
           <a:prstGeom prst="ellipse">
@@ -5501,13 +5421,13 @@
       </p:sp>
       <p:sp>
         <p:nvSpPr>
-          <p:cNvPr id="11" name="TextBox 10"/>
-          <p:cNvSpPr txBox="1"/>
-          <p:nvPr/>
-        </p:nvSpPr>
-        <p:spPr>
-          <a:xfrm>
-            <a:off x="941832" y="2414015"/>
+          <p:cNvPr id="15" name="TextBox 14"/>
+          <p:cNvSpPr txBox="1"/>
+          <p:nvPr/>
+        </p:nvSpPr>
+        <p:spPr>
+          <a:xfrm>
+            <a:off x="941832" y="3127248"/>
             <a:ext cx="402336" cy="402336"/>
           </a:xfrm>
           <a:prstGeom prst="rect">
@@ -5524,26 +5444,26 @@
           <a:p>
             <a:pPr algn="ctr"/>
             <a:r>
-              <a:rPr sz="1400" b="1">
+              <a:rPr sz="1400" b="0">
                 <a:solidFill>
                   <a:srgbClr val="FFFDF7"/>
                 </a:solidFill>
-                <a:latin typeface="Libre Caslon Display"/>
-              </a:rPr>
-              <a:t>1</a:t>
-            </a:r>
-          </a:p>
-        </p:txBody>
-      </p:sp>
-      <p:sp>
-        <p:nvSpPr>
-          <p:cNvPr id="12" name="TextBox 11"/>
-          <p:cNvSpPr txBox="1"/>
-          <p:nvPr/>
-        </p:nvSpPr>
-        <p:spPr>
-          <a:xfrm>
-            <a:off x="1572768" y="2340864"/>
+                <a:latin typeface="Georgia"/>
+              </a:rPr>
+              <a:t>2</a:t>
+            </a:r>
+          </a:p>
+        </p:txBody>
+      </p:sp>
+      <p:sp>
+        <p:nvSpPr>
+          <p:cNvPr id="16" name="TextBox 15"/>
+          <p:cNvSpPr txBox="1"/>
+          <p:nvPr/>
+        </p:nvSpPr>
+        <p:spPr>
+          <a:xfrm>
+            <a:off x="1572768" y="3054096"/>
             <a:ext cx="6583680" cy="457200"/>
           </a:xfrm>
           <a:prstGeom prst="rect">
@@ -5564,26 +5484,26 @@
               </a:lnSpc>
             </a:pPr>
             <a:r>
-              <a:rPr sz="1400" b="1">
+              <a:rPr sz="1400" b="0">
                 <a:solidFill>
                   <a:srgbClr val="6B4F3E"/>
                 </a:solidFill>
-                <a:latin typeface="Libre Caslon Display"/>
-              </a:rPr>
-              <a:t>What would you actually say?</a:t>
-            </a:r>
-          </a:p>
-        </p:txBody>
-      </p:sp>
-      <p:sp>
-        <p:nvSpPr>
-          <p:cNvPr id="13" name="Rounded Rectangle 12"/>
+                <a:latin typeface="Georgia"/>
+              </a:rPr>
+              <a:t>Which of the three is it?</a:t>
+            </a:r>
+          </a:p>
+        </p:txBody>
+      </p:sp>
+      <p:sp>
+        <p:nvSpPr>
+          <p:cNvPr id="17" name="Rounded Rectangle 16"/>
           <p:cNvSpPr/>
           <p:nvPr/>
         </p:nvSpPr>
         <p:spPr>
           <a:xfrm>
-            <a:off x="685800" y="2907791"/>
+            <a:off x="685800" y="3621024"/>
             <a:ext cx="7772400" cy="640080"/>
           </a:xfrm>
           <a:prstGeom prst="roundRect">
@@ -5623,13 +5543,13 @@
       </p:sp>
       <p:sp>
         <p:nvSpPr>
-          <p:cNvPr id="14" name="Oval 13"/>
+          <p:cNvPr id="18" name="Oval 17"/>
           <p:cNvSpPr/>
           <p:nvPr/>
         </p:nvSpPr>
         <p:spPr>
           <a:xfrm>
-            <a:off x="941832" y="3026663"/>
+            <a:off x="941832" y="3739896"/>
             <a:ext cx="402336" cy="402336"/>
           </a:xfrm>
           <a:prstGeom prst="ellipse">
@@ -5667,13 +5587,13 @@
       </p:sp>
       <p:sp>
         <p:nvSpPr>
-          <p:cNvPr id="15" name="TextBox 14"/>
-          <p:cNvSpPr txBox="1"/>
-          <p:nvPr/>
-        </p:nvSpPr>
-        <p:spPr>
-          <a:xfrm>
-            <a:off x="941832" y="3127248"/>
+          <p:cNvPr id="19" name="TextBox 18"/>
+          <p:cNvSpPr txBox="1"/>
+          <p:nvPr/>
+        </p:nvSpPr>
+        <p:spPr>
+          <a:xfrm>
+            <a:off x="941832" y="3840480"/>
             <a:ext cx="402336" cy="402336"/>
           </a:xfrm>
           <a:prstGeom prst="rect">
@@ -5690,26 +5610,26 @@
           <a:p>
             <a:pPr algn="ctr"/>
             <a:r>
-              <a:rPr sz="1400" b="1">
+              <a:rPr sz="1400" b="0">
                 <a:solidFill>
                   <a:srgbClr val="FFFDF7"/>
                 </a:solidFill>
-                <a:latin typeface="Libre Caslon Display"/>
-              </a:rPr>
-              <a:t>2</a:t>
-            </a:r>
-          </a:p>
-        </p:txBody>
-      </p:sp>
-      <p:sp>
-        <p:nvSpPr>
-          <p:cNvPr id="16" name="TextBox 15"/>
-          <p:cNvSpPr txBox="1"/>
-          <p:nvPr/>
-        </p:nvSpPr>
-        <p:spPr>
-          <a:xfrm>
-            <a:off x="1572768" y="3054096"/>
+                <a:latin typeface="Georgia"/>
+              </a:rPr>
+              <a:t>3</a:t>
+            </a:r>
+          </a:p>
+        </p:txBody>
+      </p:sp>
+      <p:sp>
+        <p:nvSpPr>
+          <p:cNvPr id="20" name="TextBox 19"/>
+          <p:cNvSpPr txBox="1"/>
+          <p:nvPr/>
+        </p:nvSpPr>
+        <p:spPr>
+          <a:xfrm>
+            <a:off x="1572768" y="3767328"/>
             <a:ext cx="6583680" cy="457200"/>
           </a:xfrm>
           <a:prstGeom prst="rect">
@@ -5730,177 +5650,11 @@
               </a:lnSpc>
             </a:pPr>
             <a:r>
-              <a:rPr sz="1400" b="1">
+              <a:rPr sz="1400" b="0">
                 <a:solidFill>
                   <a:srgbClr val="6B4F3E"/>
                 </a:solidFill>
-                <a:latin typeface="Libre Caslon Display"/>
-              </a:rPr>
-              <a:t>Which of the three is it?</a:t>
-            </a:r>
-          </a:p>
-        </p:txBody>
-      </p:sp>
-      <p:sp>
-        <p:nvSpPr>
-          <p:cNvPr id="17" name="Rounded Rectangle 16"/>
-          <p:cNvSpPr/>
-          <p:nvPr/>
-        </p:nvSpPr>
-        <p:spPr>
-          <a:xfrm>
-            <a:off x="685800" y="3621024"/>
-            <a:ext cx="7772400" cy="640080"/>
-          </a:xfrm>
-          <a:prstGeom prst="roundRect">
-            <a:avLst>
-              <a:gd name="adj" fmla="val 12857"/>
-            </a:avLst>
-          </a:prstGeom>
-          <a:solidFill>
-            <a:srgbClr val="F0EAE3"/>
-          </a:solidFill>
-          <a:ln>
-            <a:noFill/>
-          </a:ln>
-          <a:effectLst/>
-        </p:spPr>
-        <p:style>
-          <a:lnRef idx="1">
-            <a:schemeClr val="accent1"/>
-          </a:lnRef>
-          <a:fillRef idx="3">
-            <a:schemeClr val="accent1"/>
-          </a:fillRef>
-          <a:effectRef idx="2">
-            <a:schemeClr val="accent1"/>
-          </a:effectRef>
-          <a:fontRef idx="minor">
-            <a:schemeClr val="lt1"/>
-          </a:fontRef>
-        </p:style>
-        <p:txBody>
-          <a:bodyPr rtlCol="0" anchor="ctr"/>
-          <a:lstStyle/>
-          <a:p>
-            <a:pPr algn="ctr"/>
-          </a:p>
-        </p:txBody>
-      </p:sp>
-      <p:sp>
-        <p:nvSpPr>
-          <p:cNvPr id="18" name="Oval 17"/>
-          <p:cNvSpPr/>
-          <p:nvPr/>
-        </p:nvSpPr>
-        <p:spPr>
-          <a:xfrm>
-            <a:off x="941832" y="3739896"/>
-            <a:ext cx="402336" cy="402336"/>
-          </a:xfrm>
-          <a:prstGeom prst="ellipse">
-            <a:avLst/>
-          </a:prstGeom>
-          <a:solidFill>
-            <a:srgbClr val="6B4F3E"/>
-          </a:solidFill>
-          <a:ln>
-            <a:noFill/>
-          </a:ln>
-          <a:effectLst/>
-        </p:spPr>
-        <p:style>
-          <a:lnRef idx="1">
-            <a:schemeClr val="accent1"/>
-          </a:lnRef>
-          <a:fillRef idx="3">
-            <a:schemeClr val="accent1"/>
-          </a:fillRef>
-          <a:effectRef idx="2">
-            <a:schemeClr val="accent1"/>
-          </a:effectRef>
-          <a:fontRef idx="minor">
-            <a:schemeClr val="lt1"/>
-          </a:fontRef>
-        </p:style>
-        <p:txBody>
-          <a:bodyPr rtlCol="0" anchor="ctr"/>
-          <a:lstStyle/>
-          <a:p>
-            <a:pPr algn="ctr"/>
-          </a:p>
-        </p:txBody>
-      </p:sp>
-      <p:sp>
-        <p:nvSpPr>
-          <p:cNvPr id="19" name="TextBox 18"/>
-          <p:cNvSpPr txBox="1"/>
-          <p:nvPr/>
-        </p:nvSpPr>
-        <p:spPr>
-          <a:xfrm>
-            <a:off x="941832" y="3840480"/>
-            <a:ext cx="402336" cy="402336"/>
-          </a:xfrm>
-          <a:prstGeom prst="rect">
-            <a:avLst/>
-          </a:prstGeom>
-          <a:noFill/>
-          <a:effectLst/>
-        </p:spPr>
-        <p:txBody>
-          <a:bodyPr wrap="square" lIns="0" rIns="0" tIns="0" bIns="0" anchor="t">
-            <a:spAutoFit/>
-          </a:bodyPr>
-          <a:lstStyle/>
-          <a:p>
-            <a:pPr algn="ctr"/>
-            <a:r>
-              <a:rPr sz="1400" b="1">
-                <a:solidFill>
-                  <a:srgbClr val="FFFDF7"/>
-                </a:solidFill>
-                <a:latin typeface="Libre Caslon Display"/>
-              </a:rPr>
-              <a:t>3</a:t>
-            </a:r>
-          </a:p>
-        </p:txBody>
-      </p:sp>
-      <p:sp>
-        <p:nvSpPr>
-          <p:cNvPr id="20" name="TextBox 19"/>
-          <p:cNvSpPr txBox="1"/>
-          <p:nvPr/>
-        </p:nvSpPr>
-        <p:spPr>
-          <a:xfrm>
-            <a:off x="1572768" y="3767328"/>
-            <a:ext cx="6583680" cy="457200"/>
-          </a:xfrm>
-          <a:prstGeom prst="rect">
-            <a:avLst/>
-          </a:prstGeom>
-          <a:noFill/>
-          <a:effectLst/>
-        </p:spPr>
-        <p:txBody>
-          <a:bodyPr wrap="square" lIns="0" rIns="0" tIns="0" bIns="0" anchor="ctr">
-            <a:spAutoFit/>
-          </a:bodyPr>
-          <a:lstStyle/>
-          <a:p>
-            <a:pPr algn="l">
-              <a:lnSpc>
-                <a:spcPct val="110000"/>
-              </a:lnSpc>
-            </a:pPr>
-            <a:r>
-              <a:rPr sz="1400" b="1">
-                <a:solidFill>
-                  <a:srgbClr val="6B4F3E"/>
-                </a:solidFill>
-                <a:latin typeface="Libre Caslon Display"/>
+                <a:latin typeface="Georgia"/>
               </a:rPr>
               <a:t>Would it work in this form, honestly?</a:t>
             </a:r>
@@ -5940,7 +5694,7 @@
                 <a:solidFill>
                   <a:srgbClr val="6B4F3E"/>
                 </a:solidFill>
-                <a:latin typeface="Karla"/>
+                <a:latin typeface="Calibri"/>
               </a:rPr>
               <a:t>Say it out loud. Two or three go on the board.</a:t>
             </a:r>
@@ -6000,7 +5754,7 @@
                 <a:solidFill>
                   <a:srgbClr val="AAA49D"/>
                 </a:solidFill>
-                <a:latin typeface="Karla"/>
+                <a:latin typeface="Calibri"/>
               </a:rPr>
               <a:t>The Pastoral Guide</a:t>
             </a:r>
@@ -6036,7 +5790,7 @@
                 <a:solidFill>
                   <a:srgbClr val="AAA49D"/>
                 </a:solidFill>
-                <a:latin typeface="Karla"/>
+                <a:latin typeface="Calibri"/>
               </a:rPr>
               <a:t>12 / 18</a:t>
             </a:r>
@@ -6134,7 +5888,7 @@
                 <a:solidFill>
                   <a:srgbClr val="A3897A"/>
                 </a:solidFill>
-                <a:latin typeface="Karla"/>
+                <a:latin typeface="Calibri"/>
               </a:rPr>
               <a:t>TWELVE MINUTES, IN PAIRS</a:t>
             </a:r>
@@ -6143,18 +5897,54 @@
       </p:sp>
       <p:sp>
         <p:nvSpPr>
-          <p:cNvPr id="4" name="Rounded Rectangle 3"/>
+          <p:cNvPr id="6" name="TextBox 5"/>
+          <p:cNvSpPr txBox="1"/>
+          <p:nvPr/>
+        </p:nvSpPr>
+        <p:spPr>
+          <a:xfrm>
+            <a:off x="685800" y="841248"/>
+            <a:ext cx="6309360" cy="566928"/>
+          </a:xfrm>
+          <a:prstGeom prst="rect">
+            <a:avLst/>
+          </a:prstGeom>
+          <a:noFill/>
+          <a:effectLst/>
+        </p:spPr>
+        <p:txBody>
+          <a:bodyPr wrap="square" lIns="0" rIns="0" tIns="0" bIns="0" anchor="t">
+            <a:spAutoFit/>
+          </a:bodyPr>
+          <a:lstStyle/>
+          <a:p>
+            <a:pPr algn="l"/>
+            <a:r>
+              <a:rPr sz="3100" b="0">
+                <a:solidFill>
+                  <a:srgbClr val="3A332E"/>
+                </a:solidFill>
+                <a:latin typeface="Georgia"/>
+              </a:rPr>
+              <a:t>What would you say?</a:t>
+            </a:r>
+          </a:p>
+        </p:txBody>
+      </p:sp>
+      <p:sp>
+        <p:nvSpPr>
+          <p:cNvPr id="7" name="Rounded Rectangle 6"/>
           <p:cNvSpPr/>
           <p:nvPr/>
         </p:nvSpPr>
         <p:spPr>
           <a:xfrm>
-            <a:off x="7498079" y="530352"/>
-            <a:ext cx="960119" cy="347472"/>
+            <a:off x="685800" y="1737360"/>
+            <a:ext cx="7772400" cy="640080"/>
           </a:xfrm>
           <a:prstGeom prst="roundRect">
             <a:avLst>
-              <a:gd name="adj" fmla="val 50000"/>
+              <a:gd name="adj" fmla="val 12857"/>
             </a:avLst>
           </a:prstGeom>
           <a:solidFill>
@@ -6189,85 +5979,133 @@
       </p:sp>
       <p:sp>
         <p:nvSpPr>
-          <p:cNvPr id="5" name="TextBox 4"/>
-          <p:cNvSpPr txBox="1"/>
-          <p:nvPr/>
-        </p:nvSpPr>
-        <p:spPr>
-          <a:xfrm>
-            <a:off x="7498079" y="594360"/>
-            <a:ext cx="960119" cy="237744"/>
-          </a:xfrm>
-          <a:prstGeom prst="rect">
-            <a:avLst/>
-          </a:prstGeom>
-          <a:noFill/>
-          <a:effectLst/>
-        </p:spPr>
-        <p:txBody>
-          <a:bodyPr wrap="square" lIns="0" rIns="0" tIns="0" bIns="0" anchor="t">
-            <a:spAutoFit/>
-          </a:bodyPr>
+          <p:cNvPr id="8" name="Oval 7"/>
+          <p:cNvSpPr/>
+          <p:nvPr/>
+        </p:nvSpPr>
+        <p:spPr>
+          <a:xfrm>
+            <a:off x="941832" y="1856231"/>
+            <a:ext cx="402336" cy="402336"/>
+          </a:xfrm>
+          <a:prstGeom prst="ellipse">
+            <a:avLst/>
+          </a:prstGeom>
+          <a:solidFill>
+            <a:srgbClr val="6B4F3E"/>
+          </a:solidFill>
+          <a:ln>
+            <a:noFill/>
+          </a:ln>
+          <a:effectLst/>
+        </p:spPr>
+        <p:style>
+          <a:lnRef idx="1">
+            <a:schemeClr val="accent1"/>
+          </a:lnRef>
+          <a:fillRef idx="3">
+            <a:schemeClr val="accent1"/>
+          </a:fillRef>
+          <a:effectRef idx="2">
+            <a:schemeClr val="accent1"/>
+          </a:effectRef>
+          <a:fontRef idx="minor">
+            <a:schemeClr val="lt1"/>
+          </a:fontRef>
+        </p:style>
+        <p:txBody>
+          <a:bodyPr rtlCol="0" anchor="ctr"/>
           <a:lstStyle/>
           <a:p>
             <a:pPr algn="ctr"/>
-            <a:r>
-              <a:rPr sz="1000" b="1" spc="100">
+          </a:p>
+        </p:txBody>
+      </p:sp>
+      <p:sp>
+        <p:nvSpPr>
+          <p:cNvPr id="9" name="TextBox 8"/>
+          <p:cNvSpPr txBox="1"/>
+          <p:nvPr/>
+        </p:nvSpPr>
+        <p:spPr>
+          <a:xfrm>
+            <a:off x="941832" y="1956815"/>
+            <a:ext cx="402336" cy="402336"/>
+          </a:xfrm>
+          <a:prstGeom prst="rect">
+            <a:avLst/>
+          </a:prstGeom>
+          <a:noFill/>
+          <a:effectLst/>
+        </p:spPr>
+        <p:txBody>
+          <a:bodyPr wrap="square" lIns="0" rIns="0" tIns="0" bIns="0" anchor="t">
+            <a:spAutoFit/>
+          </a:bodyPr>
+          <a:lstStyle/>
+          <a:p>
+            <a:pPr algn="ctr"/>
+            <a:r>
+              <a:rPr sz="1400" b="0">
+                <a:solidFill>
+                  <a:srgbClr val="FFFDF7"/>
+                </a:solidFill>
+                <a:latin typeface="Georgia"/>
+              </a:rPr>
+              <a:t>1</a:t>
+            </a:r>
+          </a:p>
+        </p:txBody>
+      </p:sp>
+      <p:sp>
+        <p:nvSpPr>
+          <p:cNvPr id="10" name="TextBox 9"/>
+          <p:cNvSpPr txBox="1"/>
+          <p:nvPr/>
+        </p:nvSpPr>
+        <p:spPr>
+          <a:xfrm>
+            <a:off x="1572768" y="1883664"/>
+            <a:ext cx="6583680" cy="457200"/>
+          </a:xfrm>
+          <a:prstGeom prst="rect">
+            <a:avLst/>
+          </a:prstGeom>
+          <a:noFill/>
+          <a:effectLst/>
+        </p:spPr>
+        <p:txBody>
+          <a:bodyPr wrap="square" lIns="0" rIns="0" tIns="0" bIns="0" anchor="ctr">
+            <a:spAutoFit/>
+          </a:bodyPr>
+          <a:lstStyle/>
+          <a:p>
+            <a:pPr algn="l">
+              <a:lnSpc>
+                <a:spcPct val="110000"/>
+              </a:lnSpc>
+            </a:pPr>
+            <a:r>
+              <a:rPr sz="1400" b="0">
                 <a:solidFill>
                   <a:srgbClr val="6B4F3E"/>
                 </a:solidFill>
-                <a:latin typeface="Karla"/>
-              </a:rPr>
-              <a:t>YOUR TURN</a:t>
-            </a:r>
-          </a:p>
-        </p:txBody>
-      </p:sp>
-      <p:sp>
-        <p:nvSpPr>
-          <p:cNvPr id="6" name="TextBox 5"/>
-          <p:cNvSpPr txBox="1"/>
-          <p:nvPr/>
-        </p:nvSpPr>
-        <p:spPr>
-          <a:xfrm>
-            <a:off x="685800" y="841248"/>
-            <a:ext cx="6309360" cy="566928"/>
-          </a:xfrm>
-          <a:prstGeom prst="rect">
-            <a:avLst/>
-          </a:prstGeom>
-          <a:noFill/>
-          <a:effectLst/>
-        </p:spPr>
-        <p:txBody>
-          <a:bodyPr wrap="square" lIns="0" rIns="0" tIns="0" bIns="0" anchor="t">
-            <a:spAutoFit/>
-          </a:bodyPr>
-          <a:lstStyle/>
-          <a:p>
-            <a:pPr algn="l"/>
-            <a:r>
-              <a:rPr sz="3100" b="1">
-                <a:solidFill>
-                  <a:srgbClr val="3A332E"/>
-                </a:solidFill>
-                <a:latin typeface="Libre Caslon Display"/>
-              </a:rPr>
-              <a:t>What would you say?</a:t>
-            </a:r>
-          </a:p>
-        </p:txBody>
-      </p:sp>
-      <p:sp>
-        <p:nvSpPr>
-          <p:cNvPr id="7" name="Rounded Rectangle 6"/>
+                <a:latin typeface="Georgia"/>
+              </a:rPr>
+              <a:t>Take one moment card between two.</a:t>
+            </a:r>
+          </a:p>
+        </p:txBody>
+      </p:sp>
+      <p:sp>
+        <p:nvSpPr>
+          <p:cNvPr id="11" name="Rounded Rectangle 10"/>
           <p:cNvSpPr/>
           <p:nvPr/>
         </p:nvSpPr>
         <p:spPr>
           <a:xfrm>
-            <a:off x="685800" y="1737360"/>
+            <a:off x="685800" y="2487168"/>
             <a:ext cx="7772400" cy="640080"/>
           </a:xfrm>
           <a:prstGeom prst="roundRect">
@@ -6307,13 +6145,13 @@
       </p:sp>
       <p:sp>
         <p:nvSpPr>
-          <p:cNvPr id="8" name="Oval 7"/>
+          <p:cNvPr id="12" name="Oval 11"/>
           <p:cNvSpPr/>
           <p:nvPr/>
         </p:nvSpPr>
         <p:spPr>
           <a:xfrm>
-            <a:off x="941832" y="1856231"/>
+            <a:off x="941832" y="2606039"/>
             <a:ext cx="402336" cy="402336"/>
           </a:xfrm>
           <a:prstGeom prst="ellipse">
@@ -6351,13 +6189,13 @@
       </p:sp>
       <p:sp>
         <p:nvSpPr>
-          <p:cNvPr id="9" name="TextBox 8"/>
-          <p:cNvSpPr txBox="1"/>
-          <p:nvPr/>
-        </p:nvSpPr>
-        <p:spPr>
-          <a:xfrm>
-            <a:off x="941832" y="1956815"/>
+          <p:cNvPr id="13" name="TextBox 12"/>
+          <p:cNvSpPr txBox="1"/>
+          <p:nvPr/>
+        </p:nvSpPr>
+        <p:spPr>
+          <a:xfrm>
+            <a:off x="941832" y="2706624"/>
             <a:ext cx="402336" cy="402336"/>
           </a:xfrm>
           <a:prstGeom prst="rect">
@@ -6374,26 +6212,26 @@
           <a:p>
             <a:pPr algn="ctr"/>
             <a:r>
-              <a:rPr sz="1400" b="1">
+              <a:rPr sz="1400" b="0">
                 <a:solidFill>
                   <a:srgbClr val="FFFDF7"/>
                 </a:solidFill>
-                <a:latin typeface="Libre Caslon Display"/>
-              </a:rPr>
-              <a:t>1</a:t>
-            </a:r>
-          </a:p>
-        </p:txBody>
-      </p:sp>
-      <p:sp>
-        <p:nvSpPr>
-          <p:cNvPr id="10" name="TextBox 9"/>
-          <p:cNvSpPr txBox="1"/>
-          <p:nvPr/>
-        </p:nvSpPr>
-        <p:spPr>
-          <a:xfrm>
-            <a:off x="1572768" y="1883664"/>
+                <a:latin typeface="Georgia"/>
+              </a:rPr>
+              <a:t>2</a:t>
+            </a:r>
+          </a:p>
+        </p:txBody>
+      </p:sp>
+      <p:sp>
+        <p:nvSpPr>
+          <p:cNvPr id="14" name="TextBox 13"/>
+          <p:cNvSpPr txBox="1"/>
+          <p:nvPr/>
+        </p:nvSpPr>
+        <p:spPr>
+          <a:xfrm>
+            <a:off x="1572768" y="2633472"/>
             <a:ext cx="6583680" cy="457200"/>
           </a:xfrm>
           <a:prstGeom prst="rect">
@@ -6414,26 +6252,26 @@
               </a:lnSpc>
             </a:pPr>
             <a:r>
-              <a:rPr sz="1400" b="1">
+              <a:rPr sz="1400" b="0">
                 <a:solidFill>
                   <a:srgbClr val="6B4F3E"/>
                 </a:solidFill>
-                <a:latin typeface="Libre Caslon Display"/>
-              </a:rPr>
-              <a:t>Take one moment card between two.</a:t>
-            </a:r>
-          </a:p>
-        </p:txBody>
-      </p:sp>
-      <p:sp>
-        <p:nvSpPr>
-          <p:cNvPr id="11" name="Rounded Rectangle 10"/>
+                <a:latin typeface="Georgia"/>
+              </a:rPr>
+              <a:t>Write the exact words for two of the three ways out.</a:t>
+            </a:r>
+          </a:p>
+        </p:txBody>
+      </p:sp>
+      <p:sp>
+        <p:nvSpPr>
+          <p:cNvPr id="15" name="Rounded Rectangle 14"/>
           <p:cNvSpPr/>
           <p:nvPr/>
         </p:nvSpPr>
         <p:spPr>
           <a:xfrm>
-            <a:off x="685800" y="2487168"/>
+            <a:off x="685800" y="3236976"/>
             <a:ext cx="7772400" cy="640080"/>
           </a:xfrm>
           <a:prstGeom prst="roundRect">
@@ -6473,13 +6311,13 @@
       </p:sp>
       <p:sp>
         <p:nvSpPr>
-          <p:cNvPr id="12" name="Oval 11"/>
+          <p:cNvPr id="16" name="Oval 15"/>
           <p:cNvSpPr/>
           <p:nvPr/>
         </p:nvSpPr>
         <p:spPr>
           <a:xfrm>
-            <a:off x="941832" y="2606039"/>
+            <a:off x="941832" y="3355848"/>
             <a:ext cx="402336" cy="402336"/>
           </a:xfrm>
           <a:prstGeom prst="ellipse">
@@ -6517,13 +6355,13 @@
       </p:sp>
       <p:sp>
         <p:nvSpPr>
-          <p:cNvPr id="13" name="TextBox 12"/>
-          <p:cNvSpPr txBox="1"/>
-          <p:nvPr/>
-        </p:nvSpPr>
-        <p:spPr>
-          <a:xfrm>
-            <a:off x="941832" y="2706624"/>
+          <p:cNvPr id="17" name="TextBox 16"/>
+          <p:cNvSpPr txBox="1"/>
+          <p:nvPr/>
+        </p:nvSpPr>
+        <p:spPr>
+          <a:xfrm>
+            <a:off x="941832" y="3456432"/>
             <a:ext cx="402336" cy="402336"/>
           </a:xfrm>
           <a:prstGeom prst="rect">
@@ -6540,26 +6378,26 @@
           <a:p>
             <a:pPr algn="ctr"/>
             <a:r>
-              <a:rPr sz="1400" b="1">
+              <a:rPr sz="1400" b="0">
                 <a:solidFill>
                   <a:srgbClr val="FFFDF7"/>
                 </a:solidFill>
-                <a:latin typeface="Libre Caslon Display"/>
-              </a:rPr>
-              <a:t>2</a:t>
-            </a:r>
-          </a:p>
-        </p:txBody>
-      </p:sp>
-      <p:sp>
-        <p:nvSpPr>
-          <p:cNvPr id="14" name="TextBox 13"/>
-          <p:cNvSpPr txBox="1"/>
-          <p:nvPr/>
-        </p:nvSpPr>
-        <p:spPr>
-          <a:xfrm>
-            <a:off x="1572768" y="2633472"/>
+                <a:latin typeface="Georgia"/>
+              </a:rPr>
+              <a:t>3</a:t>
+            </a:r>
+          </a:p>
+        </p:txBody>
+      </p:sp>
+      <p:sp>
+        <p:nvSpPr>
+          <p:cNvPr id="18" name="TextBox 17"/>
+          <p:cNvSpPr txBox="1"/>
+          <p:nvPr/>
+        </p:nvSpPr>
+        <p:spPr>
+          <a:xfrm>
+            <a:off x="1572768" y="3383280"/>
             <a:ext cx="6583680" cy="457200"/>
           </a:xfrm>
           <a:prstGeom prst="rect">
@@ -6580,177 +6418,11 @@
               </a:lnSpc>
             </a:pPr>
             <a:r>
-              <a:rPr sz="1400" b="1">
+              <a:rPr sz="1400" b="0">
                 <a:solidFill>
                   <a:srgbClr val="6B4F3E"/>
                 </a:solidFill>
-                <a:latin typeface="Libre Caslon Display"/>
-              </a:rPr>
-              <a:t>Write the exact words for two of the three ways out.</a:t>
-            </a:r>
-          </a:p>
-        </p:txBody>
-      </p:sp>
-      <p:sp>
-        <p:nvSpPr>
-          <p:cNvPr id="15" name="Rounded Rectangle 14"/>
-          <p:cNvSpPr/>
-          <p:nvPr/>
-        </p:nvSpPr>
-        <p:spPr>
-          <a:xfrm>
-            <a:off x="685800" y="3236976"/>
-            <a:ext cx="7772400" cy="640080"/>
-          </a:xfrm>
-          <a:prstGeom prst="roundRect">
-            <a:avLst>
-              <a:gd name="adj" fmla="val 12857"/>
-            </a:avLst>
-          </a:prstGeom>
-          <a:solidFill>
-            <a:srgbClr val="F0EAE3"/>
-          </a:solidFill>
-          <a:ln>
-            <a:noFill/>
-          </a:ln>
-          <a:effectLst/>
-        </p:spPr>
-        <p:style>
-          <a:lnRef idx="1">
-            <a:schemeClr val="accent1"/>
-          </a:lnRef>
-          <a:fillRef idx="3">
-            <a:schemeClr val="accent1"/>
-          </a:fillRef>
-          <a:effectRef idx="2">
-            <a:schemeClr val="accent1"/>
-          </a:effectRef>
-          <a:fontRef idx="minor">
-            <a:schemeClr val="lt1"/>
-          </a:fontRef>
-        </p:style>
-        <p:txBody>
-          <a:bodyPr rtlCol="0" anchor="ctr"/>
-          <a:lstStyle/>
-          <a:p>
-            <a:pPr algn="ctr"/>
-          </a:p>
-        </p:txBody>
-      </p:sp>
-      <p:sp>
-        <p:nvSpPr>
-          <p:cNvPr id="16" name="Oval 15"/>
-          <p:cNvSpPr/>
-          <p:nvPr/>
-        </p:nvSpPr>
-        <p:spPr>
-          <a:xfrm>
-            <a:off x="941832" y="3355848"/>
-            <a:ext cx="402336" cy="402336"/>
-          </a:xfrm>
-          <a:prstGeom prst="ellipse">
-            <a:avLst/>
-          </a:prstGeom>
-          <a:solidFill>
-            <a:srgbClr val="6B4F3E"/>
-          </a:solidFill>
-          <a:ln>
-            <a:noFill/>
-          </a:ln>
-          <a:effectLst/>
-        </p:spPr>
-        <p:style>
-          <a:lnRef idx="1">
-            <a:schemeClr val="accent1"/>
-          </a:lnRef>
-          <a:fillRef idx="3">
-            <a:schemeClr val="accent1"/>
-          </a:fillRef>
-          <a:effectRef idx="2">
-            <a:schemeClr val="accent1"/>
-          </a:effectRef>
-          <a:fontRef idx="minor">
-            <a:schemeClr val="lt1"/>
-          </a:fontRef>
-        </p:style>
-        <p:txBody>
-          <a:bodyPr rtlCol="0" anchor="ctr"/>
-          <a:lstStyle/>
-          <a:p>
-            <a:pPr algn="ctr"/>
-          </a:p>
-        </p:txBody>
-      </p:sp>
-      <p:sp>
-        <p:nvSpPr>
-          <p:cNvPr id="17" name="TextBox 16"/>
-          <p:cNvSpPr txBox="1"/>
-          <p:nvPr/>
-        </p:nvSpPr>
-        <p:spPr>
-          <a:xfrm>
-            <a:off x="941832" y="3456432"/>
-            <a:ext cx="402336" cy="402336"/>
-          </a:xfrm>
-          <a:prstGeom prst="rect">
-            <a:avLst/>
-          </a:prstGeom>
-          <a:noFill/>
-          <a:effectLst/>
-        </p:spPr>
-        <p:txBody>
-          <a:bodyPr wrap="square" lIns="0" rIns="0" tIns="0" bIns="0" anchor="t">
-            <a:spAutoFit/>
-          </a:bodyPr>
-          <a:lstStyle/>
-          <a:p>
-            <a:pPr algn="ctr"/>
-            <a:r>
-              <a:rPr sz="1400" b="1">
-                <a:solidFill>
-                  <a:srgbClr val="FFFDF7"/>
-                </a:solidFill>
-                <a:latin typeface="Libre Caslon Display"/>
-              </a:rPr>
-              <a:t>3</a:t>
-            </a:r>
-          </a:p>
-        </p:txBody>
-      </p:sp>
-      <p:sp>
-        <p:nvSpPr>
-          <p:cNvPr id="18" name="TextBox 17"/>
-          <p:cNvSpPr txBox="1"/>
-          <p:nvPr/>
-        </p:nvSpPr>
-        <p:spPr>
-          <a:xfrm>
-            <a:off x="1572768" y="3383280"/>
-            <a:ext cx="6583680" cy="457200"/>
-          </a:xfrm>
-          <a:prstGeom prst="rect">
-            <a:avLst/>
-          </a:prstGeom>
-          <a:noFill/>
-          <a:effectLst/>
-        </p:spPr>
-        <p:txBody>
-          <a:bodyPr wrap="square" lIns="0" rIns="0" tIns="0" bIns="0" anchor="ctr">
-            <a:spAutoFit/>
-          </a:bodyPr>
-          <a:lstStyle/>
-          <a:p>
-            <a:pPr algn="l">
-              <a:lnSpc>
-                <a:spcPct val="110000"/>
-              </a:lnSpc>
-            </a:pPr>
-            <a:r>
-              <a:rPr sz="1400" b="1">
-                <a:solidFill>
-                  <a:srgbClr val="6B4F3E"/>
-                </a:solidFill>
-                <a:latin typeface="Libre Caslon Display"/>
+                <a:latin typeface="Georgia"/>
               </a:rPr>
               <a:t>Say them to each other. If you would not say it out loud, change it.</a:t>
             </a:r>
@@ -6790,7 +6462,7 @@
                 <a:solidFill>
                   <a:srgbClr val="6B4F3E"/>
                 </a:solidFill>
-                <a:latin typeface="Karla"/>
+                <a:latin typeface="Calibri"/>
               </a:rPr>
               <a:t>Real words, not the ones that sound good. Nobody is marking you on being nice.</a:t>
             </a:r>
@@ -6850,7 +6522,7 @@
                 <a:solidFill>
                   <a:srgbClr val="AAA49D"/>
                 </a:solidFill>
-                <a:latin typeface="Karla"/>
+                <a:latin typeface="Calibri"/>
               </a:rPr>
               <a:t>The Pastoral Guide</a:t>
             </a:r>
@@ -6886,7 +6558,7 @@
                 <a:solidFill>
                   <a:srgbClr val="AAA49D"/>
                 </a:solidFill>
-                <a:latin typeface="Karla"/>
+                <a:latin typeface="Calibri"/>
               </a:rPr>
               <a:t>13 / 18</a:t>
             </a:r>
@@ -6984,7 +6656,7 @@
                 <a:solidFill>
                   <a:srgbClr val="A3897A"/>
                 </a:solidFill>
-                <a:latin typeface="Karla"/>
+                <a:latin typeface="Calibri"/>
               </a:rPr>
               <a:t>SWAP</a:t>
             </a:r>
@@ -6993,18 +6665,54 @@
       </p:sp>
       <p:sp>
         <p:nvSpPr>
-          <p:cNvPr id="4" name="Rounded Rectangle 3"/>
+          <p:cNvPr id="6" name="TextBox 5"/>
+          <p:cNvSpPr txBox="1"/>
+          <p:nvPr/>
+        </p:nvSpPr>
+        <p:spPr>
+          <a:xfrm>
+            <a:off x="685800" y="841248"/>
+            <a:ext cx="6309360" cy="566928"/>
+          </a:xfrm>
+          <a:prstGeom prst="rect">
+            <a:avLst/>
+          </a:prstGeom>
+          <a:noFill/>
+          <a:effectLst/>
+        </p:spPr>
+        <p:txBody>
+          <a:bodyPr wrap="square" lIns="0" rIns="0" tIns="0" bIns="0" anchor="t">
+            <a:spAutoFit/>
+          </a:bodyPr>
+          <a:lstStyle/>
+          <a:p>
+            <a:pPr algn="l"/>
+            <a:r>
+              <a:rPr sz="3100" b="0">
+                <a:solidFill>
+                  <a:srgbClr val="3A332E"/>
+                </a:solidFill>
+                <a:latin typeface="Georgia"/>
+              </a:rPr>
+              <a:t>Mark somebody else’s</a:t>
+            </a:r>
+          </a:p>
+        </p:txBody>
+      </p:sp>
+      <p:sp>
+        <p:nvSpPr>
+          <p:cNvPr id="7" name="Rounded Rectangle 6"/>
           <p:cNvSpPr/>
           <p:nvPr/>
         </p:nvSpPr>
         <p:spPr>
           <a:xfrm>
-            <a:off x="7543800" y="530352"/>
-            <a:ext cx="914400" cy="347472"/>
+            <a:off x="685800" y="1737360"/>
+            <a:ext cx="7772400" cy="640080"/>
           </a:xfrm>
           <a:prstGeom prst="roundRect">
             <a:avLst>
-              <a:gd name="adj" fmla="val 50000"/>
+              <a:gd name="adj" fmla="val 12857"/>
             </a:avLst>
           </a:prstGeom>
           <a:solidFill>
@@ -7039,85 +6747,133 @@
       </p:sp>
       <p:sp>
         <p:nvSpPr>
-          <p:cNvPr id="5" name="TextBox 4"/>
-          <p:cNvSpPr txBox="1"/>
-          <p:nvPr/>
-        </p:nvSpPr>
-        <p:spPr>
-          <a:xfrm>
-            <a:off x="7543800" y="594360"/>
-            <a:ext cx="914400" cy="237744"/>
-          </a:xfrm>
-          <a:prstGeom prst="rect">
-            <a:avLst/>
-          </a:prstGeom>
-          <a:noFill/>
-          <a:effectLst/>
-        </p:spPr>
-        <p:txBody>
-          <a:bodyPr wrap="square" lIns="0" rIns="0" tIns="0" bIns="0" anchor="t">
-            <a:spAutoFit/>
-          </a:bodyPr>
+          <p:cNvPr id="8" name="Oval 7"/>
+          <p:cNvSpPr/>
+          <p:nvPr/>
+        </p:nvSpPr>
+        <p:spPr>
+          <a:xfrm>
+            <a:off x="941832" y="1856231"/>
+            <a:ext cx="402336" cy="402336"/>
+          </a:xfrm>
+          <a:prstGeom prst="ellipse">
+            <a:avLst/>
+          </a:prstGeom>
+          <a:solidFill>
+            <a:srgbClr val="6B4F3E"/>
+          </a:solidFill>
+          <a:ln>
+            <a:noFill/>
+          </a:ln>
+          <a:effectLst/>
+        </p:spPr>
+        <p:style>
+          <a:lnRef idx="1">
+            <a:schemeClr val="accent1"/>
+          </a:lnRef>
+          <a:fillRef idx="3">
+            <a:schemeClr val="accent1"/>
+          </a:fillRef>
+          <a:effectRef idx="2">
+            <a:schemeClr val="accent1"/>
+          </a:effectRef>
+          <a:fontRef idx="minor">
+            <a:schemeClr val="lt1"/>
+          </a:fontRef>
+        </p:style>
+        <p:txBody>
+          <a:bodyPr rtlCol="0" anchor="ctr"/>
           <a:lstStyle/>
           <a:p>
             <a:pPr algn="ctr"/>
-            <a:r>
-              <a:rPr sz="1000" b="1" spc="100">
+          </a:p>
+        </p:txBody>
+      </p:sp>
+      <p:sp>
+        <p:nvSpPr>
+          <p:cNvPr id="9" name="TextBox 8"/>
+          <p:cNvSpPr txBox="1"/>
+          <p:nvPr/>
+        </p:nvSpPr>
+        <p:spPr>
+          <a:xfrm>
+            <a:off x="941832" y="1956815"/>
+            <a:ext cx="402336" cy="402336"/>
+          </a:xfrm>
+          <a:prstGeom prst="rect">
+            <a:avLst/>
+          </a:prstGeom>
+          <a:noFill/>
+          <a:effectLst/>
+        </p:spPr>
+        <p:txBody>
+          <a:bodyPr wrap="square" lIns="0" rIns="0" tIns="0" bIns="0" anchor="t">
+            <a:spAutoFit/>
+          </a:bodyPr>
+          <a:lstStyle/>
+          <a:p>
+            <a:pPr algn="ctr"/>
+            <a:r>
+              <a:rPr sz="1400" b="0">
+                <a:solidFill>
+                  <a:srgbClr val="FFFDF7"/>
+                </a:solidFill>
+                <a:latin typeface="Georgia"/>
+              </a:rPr>
+              <a:t>1</a:t>
+            </a:r>
+          </a:p>
+        </p:txBody>
+      </p:sp>
+      <p:sp>
+        <p:nvSpPr>
+          <p:cNvPr id="10" name="TextBox 9"/>
+          <p:cNvSpPr txBox="1"/>
+          <p:nvPr/>
+        </p:nvSpPr>
+        <p:spPr>
+          <a:xfrm>
+            <a:off x="1572768" y="1883664"/>
+            <a:ext cx="6583680" cy="457200"/>
+          </a:xfrm>
+          <a:prstGeom prst="rect">
+            <a:avLst/>
+          </a:prstGeom>
+          <a:noFill/>
+          <a:effectLst/>
+        </p:spPr>
+        <p:txBody>
+          <a:bodyPr wrap="square" lIns="0" rIns="0" tIns="0" bIns="0" anchor="ctr">
+            <a:spAutoFit/>
+          </a:bodyPr>
+          <a:lstStyle/>
+          <a:p>
+            <a:pPr algn="l">
+              <a:lnSpc>
+                <a:spcPct val="110000"/>
+              </a:lnSpc>
+            </a:pPr>
+            <a:r>
+              <a:rPr sz="1400" b="0">
                 <a:solidFill>
                   <a:srgbClr val="6B4F3E"/>
                 </a:solidFill>
-                <a:latin typeface="Karla"/>
-              </a:rPr>
-              <a:t>MARK</a:t>
-            </a:r>
-          </a:p>
-        </p:txBody>
-      </p:sp>
-      <p:sp>
-        <p:nvSpPr>
-          <p:cNvPr id="6" name="TextBox 5"/>
-          <p:cNvSpPr txBox="1"/>
-          <p:nvPr/>
-        </p:nvSpPr>
-        <p:spPr>
-          <a:xfrm>
-            <a:off x="685800" y="841248"/>
-            <a:ext cx="6309360" cy="566928"/>
-          </a:xfrm>
-          <a:prstGeom prst="rect">
-            <a:avLst/>
-          </a:prstGeom>
-          <a:noFill/>
-          <a:effectLst/>
-        </p:spPr>
-        <p:txBody>
-          <a:bodyPr wrap="square" lIns="0" rIns="0" tIns="0" bIns="0" anchor="t">
-            <a:spAutoFit/>
-          </a:bodyPr>
-          <a:lstStyle/>
-          <a:p>
-            <a:pPr algn="l"/>
-            <a:r>
-              <a:rPr sz="3100" b="1">
-                <a:solidFill>
-                  <a:srgbClr val="3A332E"/>
-                </a:solidFill>
-                <a:latin typeface="Libre Caslon Display"/>
-              </a:rPr>
-              <a:t>Mark somebody else’s</a:t>
-            </a:r>
-          </a:p>
-        </p:txBody>
-      </p:sp>
-      <p:sp>
-        <p:nvSpPr>
-          <p:cNvPr id="7" name="Rounded Rectangle 6"/>
+                <a:latin typeface="Georgia"/>
+              </a:rPr>
+              <a:t>Could they actually say this out loud, in this school?</a:t>
+            </a:r>
+          </a:p>
+        </p:txBody>
+      </p:sp>
+      <p:sp>
+        <p:nvSpPr>
+          <p:cNvPr id="11" name="Rounded Rectangle 10"/>
           <p:cNvSpPr/>
           <p:nvPr/>
         </p:nvSpPr>
         <p:spPr>
           <a:xfrm>
-            <a:off x="685800" y="1737360"/>
+            <a:off x="685800" y="2487168"/>
             <a:ext cx="7772400" cy="640080"/>
           </a:xfrm>
           <a:prstGeom prst="roundRect">
@@ -7157,13 +6913,13 @@
       </p:sp>
       <p:sp>
         <p:nvSpPr>
-          <p:cNvPr id="8" name="Oval 7"/>
+          <p:cNvPr id="12" name="Oval 11"/>
           <p:cNvSpPr/>
           <p:nvPr/>
         </p:nvSpPr>
         <p:spPr>
           <a:xfrm>
-            <a:off x="941832" y="1856231"/>
+            <a:off x="941832" y="2606039"/>
             <a:ext cx="402336" cy="402336"/>
           </a:xfrm>
           <a:prstGeom prst="ellipse">
@@ -7201,13 +6957,13 @@
       </p:sp>
       <p:sp>
         <p:nvSpPr>
-          <p:cNvPr id="9" name="TextBox 8"/>
-          <p:cNvSpPr txBox="1"/>
-          <p:nvPr/>
-        </p:nvSpPr>
-        <p:spPr>
-          <a:xfrm>
-            <a:off x="941832" y="1956815"/>
+          <p:cNvPr id="13" name="TextBox 12"/>
+          <p:cNvSpPr txBox="1"/>
+          <p:nvPr/>
+        </p:nvSpPr>
+        <p:spPr>
+          <a:xfrm>
+            <a:off x="941832" y="2706624"/>
             <a:ext cx="402336" cy="402336"/>
           </a:xfrm>
           <a:prstGeom prst="rect">
@@ -7224,26 +6980,26 @@
           <a:p>
             <a:pPr algn="ctr"/>
             <a:r>
-              <a:rPr sz="1400" b="1">
+              <a:rPr sz="1400" b="0">
                 <a:solidFill>
                   <a:srgbClr val="FFFDF7"/>
                 </a:solidFill>
-                <a:latin typeface="Libre Caslon Display"/>
-              </a:rPr>
-              <a:t>1</a:t>
-            </a:r>
-          </a:p>
-        </p:txBody>
-      </p:sp>
-      <p:sp>
-        <p:nvSpPr>
-          <p:cNvPr id="10" name="TextBox 9"/>
-          <p:cNvSpPr txBox="1"/>
-          <p:nvPr/>
-        </p:nvSpPr>
-        <p:spPr>
-          <a:xfrm>
-            <a:off x="1572768" y="1883664"/>
+                <a:latin typeface="Georgia"/>
+              </a:rPr>
+              <a:t>2</a:t>
+            </a:r>
+          </a:p>
+        </p:txBody>
+      </p:sp>
+      <p:sp>
+        <p:nvSpPr>
+          <p:cNvPr id="14" name="TextBox 13"/>
+          <p:cNvSpPr txBox="1"/>
+          <p:nvPr/>
+        </p:nvSpPr>
+        <p:spPr>
+          <a:xfrm>
+            <a:off x="1572768" y="2633472"/>
             <a:ext cx="6583680" cy="457200"/>
           </a:xfrm>
           <a:prstGeom prst="rect">
@@ -7264,26 +7020,26 @@
               </a:lnSpc>
             </a:pPr>
             <a:r>
-              <a:rPr sz="1400" b="1">
+              <a:rPr sz="1400" b="0">
                 <a:solidFill>
                   <a:srgbClr val="6B4F3E"/>
                 </a:solidFill>
-                <a:latin typeface="Libre Caslon Display"/>
-              </a:rPr>
-              <a:t>Could they actually say this out loud, in this school?</a:t>
-            </a:r>
-          </a:p>
-        </p:txBody>
-      </p:sp>
-      <p:sp>
-        <p:nvSpPr>
-          <p:cNvPr id="11" name="Rounded Rectangle 10"/>
+                <a:latin typeface="Georgia"/>
+              </a:rPr>
+              <a:t>Does it avoid putting anybody on trial?</a:t>
+            </a:r>
+          </a:p>
+        </p:txBody>
+      </p:sp>
+      <p:sp>
+        <p:nvSpPr>
+          <p:cNvPr id="15" name="Rounded Rectangle 14"/>
           <p:cNvSpPr/>
           <p:nvPr/>
         </p:nvSpPr>
         <p:spPr>
           <a:xfrm>
-            <a:off x="685800" y="2487168"/>
+            <a:off x="685800" y="3236976"/>
             <a:ext cx="7772400" cy="640080"/>
           </a:xfrm>
           <a:prstGeom prst="roundRect">
@@ -7323,13 +7079,13 @@
       </p:sp>
       <p:sp>
         <p:nvSpPr>
-          <p:cNvPr id="12" name="Oval 11"/>
+          <p:cNvPr id="16" name="Oval 15"/>
           <p:cNvSpPr/>
           <p:nvPr/>
         </p:nvSpPr>
         <p:spPr>
           <a:xfrm>
-            <a:off x="941832" y="2606039"/>
+            <a:off x="941832" y="3355848"/>
             <a:ext cx="402336" cy="402336"/>
           </a:xfrm>
           <a:prstGeom prst="ellipse">
@@ -7367,13 +7123,13 @@
       </p:sp>
       <p:sp>
         <p:nvSpPr>
-          <p:cNvPr id="13" name="TextBox 12"/>
-          <p:cNvSpPr txBox="1"/>
-          <p:nvPr/>
-        </p:nvSpPr>
-        <p:spPr>
-          <a:xfrm>
-            <a:off x="941832" y="2706624"/>
+          <p:cNvPr id="17" name="TextBox 16"/>
+          <p:cNvSpPr txBox="1"/>
+          <p:nvPr/>
+        </p:nvSpPr>
+        <p:spPr>
+          <a:xfrm>
+            <a:off x="941832" y="3456432"/>
             <a:ext cx="402336" cy="402336"/>
           </a:xfrm>
           <a:prstGeom prst="rect">
@@ -7390,26 +7146,26 @@
           <a:p>
             <a:pPr algn="ctr"/>
             <a:r>
-              <a:rPr sz="1400" b="1">
+              <a:rPr sz="1400" b="0">
                 <a:solidFill>
                   <a:srgbClr val="FFFDF7"/>
                 </a:solidFill>
-                <a:latin typeface="Libre Caslon Display"/>
-              </a:rPr>
-              <a:t>2</a:t>
-            </a:r>
-          </a:p>
-        </p:txBody>
-      </p:sp>
-      <p:sp>
-        <p:nvSpPr>
-          <p:cNvPr id="14" name="TextBox 13"/>
-          <p:cNvSpPr txBox="1"/>
-          <p:nvPr/>
-        </p:nvSpPr>
-        <p:spPr>
-          <a:xfrm>
-            <a:off x="1572768" y="2633472"/>
+                <a:latin typeface="Georgia"/>
+              </a:rPr>
+              <a:t>3</a:t>
+            </a:r>
+          </a:p>
+        </p:txBody>
+      </p:sp>
+      <p:sp>
+        <p:nvSpPr>
+          <p:cNvPr id="18" name="TextBox 17"/>
+          <p:cNvSpPr txBox="1"/>
+          <p:nvPr/>
+        </p:nvSpPr>
+        <p:spPr>
+          <a:xfrm>
+            <a:off x="1572768" y="3383280"/>
             <a:ext cx="6583680" cy="457200"/>
           </a:xfrm>
           <a:prstGeom prst="rect">
@@ -7430,177 +7186,11 @@
               </a:lnSpc>
             </a:pPr>
             <a:r>
-              <a:rPr sz="1400" b="1">
+              <a:rPr sz="1400" b="0">
                 <a:solidFill>
                   <a:srgbClr val="6B4F3E"/>
                 </a:solidFill>
-                <a:latin typeface="Libre Caslon Display"/>
-              </a:rPr>
-              <a:t>Does it avoid putting anybody on trial?</a:t>
-            </a:r>
-          </a:p>
-        </p:txBody>
-      </p:sp>
-      <p:sp>
-        <p:nvSpPr>
-          <p:cNvPr id="15" name="Rounded Rectangle 14"/>
-          <p:cNvSpPr/>
-          <p:nvPr/>
-        </p:nvSpPr>
-        <p:spPr>
-          <a:xfrm>
-            <a:off x="685800" y="3236976"/>
-            <a:ext cx="7772400" cy="640080"/>
-          </a:xfrm>
-          <a:prstGeom prst="roundRect">
-            <a:avLst>
-              <a:gd name="adj" fmla="val 12857"/>
-            </a:avLst>
-          </a:prstGeom>
-          <a:solidFill>
-            <a:srgbClr val="F0EAE3"/>
-          </a:solidFill>
-          <a:ln>
-            <a:noFill/>
-          </a:ln>
-          <a:effectLst/>
-        </p:spPr>
-        <p:style>
-          <a:lnRef idx="1">
-            <a:schemeClr val="accent1"/>
-          </a:lnRef>
-          <a:fillRef idx="3">
-            <a:schemeClr val="accent1"/>
-          </a:fillRef>
-          <a:effectRef idx="2">
-            <a:schemeClr val="accent1"/>
-          </a:effectRef>
-          <a:fontRef idx="minor">
-            <a:schemeClr val="lt1"/>
-          </a:fontRef>
-        </p:style>
-        <p:txBody>
-          <a:bodyPr rtlCol="0" anchor="ctr"/>
-          <a:lstStyle/>
-          <a:p>
-            <a:pPr algn="ctr"/>
-          </a:p>
-        </p:txBody>
-      </p:sp>
-      <p:sp>
-        <p:nvSpPr>
-          <p:cNvPr id="16" name="Oval 15"/>
-          <p:cNvSpPr/>
-          <p:nvPr/>
-        </p:nvSpPr>
-        <p:spPr>
-          <a:xfrm>
-            <a:off x="941832" y="3355848"/>
-            <a:ext cx="402336" cy="402336"/>
-          </a:xfrm>
-          <a:prstGeom prst="ellipse">
-            <a:avLst/>
-          </a:prstGeom>
-          <a:solidFill>
-            <a:srgbClr val="6B4F3E"/>
-          </a:solidFill>
-          <a:ln>
-            <a:noFill/>
-          </a:ln>
-          <a:effectLst/>
-        </p:spPr>
-        <p:style>
-          <a:lnRef idx="1">
-            <a:schemeClr val="accent1"/>
-          </a:lnRef>
-          <a:fillRef idx="3">
-            <a:schemeClr val="accent1"/>
-          </a:fillRef>
-          <a:effectRef idx="2">
-            <a:schemeClr val="accent1"/>
-          </a:effectRef>
-          <a:fontRef idx="minor">
-            <a:schemeClr val="lt1"/>
-          </a:fontRef>
-        </p:style>
-        <p:txBody>
-          <a:bodyPr rtlCol="0" anchor="ctr"/>
-          <a:lstStyle/>
-          <a:p>
-            <a:pPr algn="ctr"/>
-          </a:p>
-        </p:txBody>
-      </p:sp>
-      <p:sp>
-        <p:nvSpPr>
-          <p:cNvPr id="17" name="TextBox 16"/>
-          <p:cNvSpPr txBox="1"/>
-          <p:nvPr/>
-        </p:nvSpPr>
-        <p:spPr>
-          <a:xfrm>
-            <a:off x="941832" y="3456432"/>
-            <a:ext cx="402336" cy="402336"/>
-          </a:xfrm>
-          <a:prstGeom prst="rect">
-            <a:avLst/>
-          </a:prstGeom>
-          <a:noFill/>
-          <a:effectLst/>
-        </p:spPr>
-        <p:txBody>
-          <a:bodyPr wrap="square" lIns="0" rIns="0" tIns="0" bIns="0" anchor="t">
-            <a:spAutoFit/>
-          </a:bodyPr>
-          <a:lstStyle/>
-          <a:p>
-            <a:pPr algn="ctr"/>
-            <a:r>
-              <a:rPr sz="1400" b="1">
-                <a:solidFill>
-                  <a:srgbClr val="FFFDF7"/>
-                </a:solidFill>
-                <a:latin typeface="Libre Caslon Display"/>
-              </a:rPr>
-              <a:t>3</a:t>
-            </a:r>
-          </a:p>
-        </p:txBody>
-      </p:sp>
-      <p:sp>
-        <p:nvSpPr>
-          <p:cNvPr id="18" name="TextBox 17"/>
-          <p:cNvSpPr txBox="1"/>
-          <p:nvPr/>
-        </p:nvSpPr>
-        <p:spPr>
-          <a:xfrm>
-            <a:off x="1572768" y="3383280"/>
-            <a:ext cx="6583680" cy="457200"/>
-          </a:xfrm>
-          <a:prstGeom prst="rect">
-            <a:avLst/>
-          </a:prstGeom>
-          <a:noFill/>
-          <a:effectLst/>
-        </p:spPr>
-        <p:txBody>
-          <a:bodyPr wrap="square" lIns="0" rIns="0" tIns="0" bIns="0" anchor="ctr">
-            <a:spAutoFit/>
-          </a:bodyPr>
-          <a:lstStyle/>
-          <a:p>
-            <a:pPr algn="l">
-              <a:lnSpc>
-                <a:spcPct val="110000"/>
-              </a:lnSpc>
-            </a:pPr>
-            <a:r>
-              <a:rPr sz="1400" b="1">
-                <a:solidFill>
-                  <a:srgbClr val="6B4F3E"/>
-                </a:solidFill>
-                <a:latin typeface="Libre Caslon Display"/>
+                <a:latin typeface="Georgia"/>
               </a:rPr>
               <a:t>Would it end the audience, or start an argument?</a:t>
             </a:r>
@@ -7640,7 +7230,7 @@
                 <a:solidFill>
                   <a:srgbClr val="6B4F3E"/>
                 </a:solidFill>
-                <a:latin typeface="Karla"/>
+                <a:latin typeface="Calibri"/>
               </a:rPr>
               <a:t>Move your sheet two tables along. Tick what it passes, write one change that would get it said, then send it back.</a:t>
             </a:r>
@@ -7700,7 +7290,7 @@
                 <a:solidFill>
                   <a:srgbClr val="AAA49D"/>
                 </a:solidFill>
-                <a:latin typeface="Karla"/>
+                <a:latin typeface="Calibri"/>
               </a:rPr>
               <a:t>The Pastoral Guide</a:t>
             </a:r>
@@ -7736,7 +7326,7 @@
                 <a:solidFill>
                   <a:srgbClr val="AAA49D"/>
                 </a:solidFill>
-                <a:latin typeface="Karla"/>
+                <a:latin typeface="Calibri"/>
               </a:rPr>
               <a:t>14 / 18</a:t>
             </a:r>
@@ -7834,91 +7424,9 @@
                 <a:solidFill>
                   <a:srgbClr val="A3897A"/>
                 </a:solidFill>
-                <a:latin typeface="Karla"/>
+                <a:latin typeface="Calibri"/>
               </a:rPr>
               <a:t>NO RIGHT ANSWER</a:t>
-            </a:r>
-          </a:p>
-        </p:txBody>
-      </p:sp>
-      <p:sp>
-        <p:nvSpPr>
-          <p:cNvPr id="4" name="Rounded Rectangle 3"/>
-          <p:cNvSpPr/>
-          <p:nvPr/>
-        </p:nvSpPr>
-        <p:spPr>
-          <a:xfrm>
-            <a:off x="7543800" y="530352"/>
-            <a:ext cx="914400" cy="347472"/>
-          </a:xfrm>
-          <a:prstGeom prst="roundRect">
-            <a:avLst>
-              <a:gd name="adj" fmla="val 50000"/>
-            </a:avLst>
-          </a:prstGeom>
-          <a:solidFill>
-            <a:srgbClr val="F0EAE3"/>
-          </a:solidFill>
-          <a:ln>
-            <a:noFill/>
-          </a:ln>
-          <a:effectLst/>
-        </p:spPr>
-        <p:style>
-          <a:lnRef idx="1">
-            <a:schemeClr val="accent1"/>
-          </a:lnRef>
-          <a:fillRef idx="3">
-            <a:schemeClr val="accent1"/>
-          </a:fillRef>
-          <a:effectRef idx="2">
-            <a:schemeClr val="accent1"/>
-          </a:effectRef>
-          <a:fontRef idx="minor">
-            <a:schemeClr val="lt1"/>
-          </a:fontRef>
-        </p:style>
-        <p:txBody>
-          <a:bodyPr rtlCol="0" anchor="ctr"/>
-          <a:lstStyle/>
-          <a:p>
-            <a:pPr algn="ctr"/>
-          </a:p>
-        </p:txBody>
-      </p:sp>
-      <p:sp>
-        <p:nvSpPr>
-          <p:cNvPr id="5" name="TextBox 4"/>
-          <p:cNvSpPr txBox="1"/>
-          <p:nvPr/>
-        </p:nvSpPr>
-        <p:spPr>
-          <a:xfrm>
-            <a:off x="7543800" y="594360"/>
-            <a:ext cx="914400" cy="237744"/>
-          </a:xfrm>
-          <a:prstGeom prst="rect">
-            <a:avLst/>
-          </a:prstGeom>
-          <a:noFill/>
-          <a:effectLst/>
-        </p:spPr>
-        <p:txBody>
-          <a:bodyPr wrap="square" lIns="0" rIns="0" tIns="0" bIns="0" anchor="t">
-            <a:spAutoFit/>
-          </a:bodyPr>
-          <a:lstStyle/>
-          <a:p>
-            <a:pPr algn="ctr"/>
-            <a:r>
-              <a:rPr sz="1000" b="1" spc="100">
-                <a:solidFill>
-                  <a:srgbClr val="6B4F3E"/>
-                </a:solidFill>
-                <a:latin typeface="Karla"/>
-              </a:rPr>
-              <a:t>ARGUE</a:t>
             </a:r>
           </a:p>
         </p:txBody>
@@ -7948,11 +7456,11 @@
           <a:p>
             <a:pPr algn="l"/>
             <a:r>
-              <a:rPr sz="3100" b="1">
+              <a:rPr sz="3100" b="0">
                 <a:solidFill>
                   <a:srgbClr val="3A332E"/>
                 </a:solidFill>
-                <a:latin typeface="Libre Caslon Display"/>
+                <a:latin typeface="Georgia"/>
               </a:rPr>
               <a:t>Is not laughing enough?</a:t>
             </a:r>
@@ -8038,7 +7546,7 @@
                 <a:solidFill>
                   <a:srgbClr val="3A332E"/>
                 </a:solidFill>
-                <a:latin typeface="Libre Caslon Display"/>
+                <a:latin typeface="Georgia"/>
               </a:rPr>
               <a:t>You did not say anything.</a:t>
             </a:r>
@@ -8048,7 +7556,7 @@
                 <a:solidFill>
                   <a:srgbClr val="3A332E"/>
                 </a:solidFill>
-                <a:latin typeface="Libre Caslon Display"/>
+                <a:latin typeface="Georgia"/>
               </a:rPr>
               <a:t>You did not laugh either.</a:t>
             </a:r>
@@ -8058,7 +7566,7 @@
                 <a:solidFill>
                   <a:srgbClr val="3A332E"/>
                 </a:solidFill>
-                <a:latin typeface="Libre Caslon Display"/>
+                <a:latin typeface="Georgia"/>
               </a:rPr>
               <a:t>Have you done something, or nothing?</a:t>
             </a:r>
@@ -8098,7 +7606,7 @@
                 <a:solidFill>
                   <a:srgbClr val="706962"/>
                 </a:solidFill>
-                <a:latin typeface="Karla"/>
+                <a:latin typeface="Calibri"/>
               </a:rPr>
               <a:t>Both answers can be argued. Five minutes, and see where your form lands.</a:t>
             </a:r>
@@ -8158,7 +7666,7 @@
                 <a:solidFill>
                   <a:srgbClr val="AAA49D"/>
                 </a:solidFill>
-                <a:latin typeface="Karla"/>
+                <a:latin typeface="Calibri"/>
               </a:rPr>
               <a:t>The Pastoral Guide</a:t>
             </a:r>
@@ -8194,7 +7702,7 @@
                 <a:solidFill>
                   <a:srgbClr val="AAA49D"/>
                 </a:solidFill>
-                <a:latin typeface="Karla"/>
+                <a:latin typeface="Calibri"/>
               </a:rPr>
               <a:t>15 / 18</a:t>
             </a:r>
@@ -8292,7 +7800,7 @@
                 <a:solidFill>
                   <a:srgbClr val="A3897A"/>
                 </a:solidFill>
-                <a:latin typeface="Karla"/>
+                <a:latin typeface="Calibri"/>
               </a:rPr>
               <a:t>LAST FIVE MINUTES</a:t>
             </a:r>
@@ -8301,18 +7809,54 @@
       </p:sp>
       <p:sp>
         <p:nvSpPr>
-          <p:cNvPr id="4" name="Rounded Rectangle 3"/>
+          <p:cNvPr id="6" name="TextBox 5"/>
+          <p:cNvSpPr txBox="1"/>
+          <p:nvPr/>
+        </p:nvSpPr>
+        <p:spPr>
+          <a:xfrm>
+            <a:off x="685800" y="841248"/>
+            <a:ext cx="6309360" cy="566928"/>
+          </a:xfrm>
+          <a:prstGeom prst="rect">
+            <a:avLst/>
+          </a:prstGeom>
+          <a:noFill/>
+          <a:effectLst/>
+        </p:spPr>
+        <p:txBody>
+          <a:bodyPr wrap="square" lIns="0" rIns="0" tIns="0" bIns="0" anchor="t">
+            <a:spAutoFit/>
+          </a:bodyPr>
+          <a:lstStyle/>
+          <a:p>
+            <a:pPr algn="l"/>
+            <a:r>
+              <a:rPr sz="3100" b="0">
+                <a:solidFill>
+                  <a:srgbClr val="3A332E"/>
+                </a:solidFill>
+                <a:latin typeface="Georgia"/>
+              </a:rPr>
+              <a:t>Two questions, for you</a:t>
+            </a:r>
+          </a:p>
+        </p:txBody>
+      </p:sp>
+      <p:sp>
+        <p:nvSpPr>
+          <p:cNvPr id="7" name="Rounded Rectangle 6"/>
           <p:cNvSpPr/>
           <p:nvPr/>
         </p:nvSpPr>
         <p:spPr>
           <a:xfrm>
-            <a:off x="7543800" y="530352"/>
-            <a:ext cx="914400" cy="347472"/>
+            <a:off x="685800" y="1874519"/>
+            <a:ext cx="7772400" cy="640080"/>
           </a:xfrm>
           <a:prstGeom prst="roundRect">
             <a:avLst>
-              <a:gd name="adj" fmla="val 50000"/>
+              <a:gd name="adj" fmla="val 12857"/>
             </a:avLst>
           </a:prstGeom>
           <a:solidFill>
@@ -8347,85 +7891,133 @@
       </p:sp>
       <p:sp>
         <p:nvSpPr>
-          <p:cNvPr id="5" name="TextBox 4"/>
-          <p:cNvSpPr txBox="1"/>
-          <p:nvPr/>
-        </p:nvSpPr>
-        <p:spPr>
-          <a:xfrm>
-            <a:off x="7543800" y="594360"/>
-            <a:ext cx="914400" cy="237744"/>
-          </a:xfrm>
-          <a:prstGeom prst="rect">
-            <a:avLst/>
-          </a:prstGeom>
-          <a:noFill/>
-          <a:effectLst/>
-        </p:spPr>
-        <p:txBody>
-          <a:bodyPr wrap="square" lIns="0" rIns="0" tIns="0" bIns="0" anchor="t">
-            <a:spAutoFit/>
-          </a:bodyPr>
+          <p:cNvPr id="8" name="Oval 7"/>
+          <p:cNvSpPr/>
+          <p:nvPr/>
+        </p:nvSpPr>
+        <p:spPr>
+          <a:xfrm>
+            <a:off x="941832" y="1993391"/>
+            <a:ext cx="402336" cy="402336"/>
+          </a:xfrm>
+          <a:prstGeom prst="ellipse">
+            <a:avLst/>
+          </a:prstGeom>
+          <a:solidFill>
+            <a:srgbClr val="6B4F3E"/>
+          </a:solidFill>
+          <a:ln>
+            <a:noFill/>
+          </a:ln>
+          <a:effectLst/>
+        </p:spPr>
+        <p:style>
+          <a:lnRef idx="1">
+            <a:schemeClr val="accent1"/>
+          </a:lnRef>
+          <a:fillRef idx="3">
+            <a:schemeClr val="accent1"/>
+          </a:fillRef>
+          <a:effectRef idx="2">
+            <a:schemeClr val="accent1"/>
+          </a:effectRef>
+          <a:fontRef idx="minor">
+            <a:schemeClr val="lt1"/>
+          </a:fontRef>
+        </p:style>
+        <p:txBody>
+          <a:bodyPr rtlCol="0" anchor="ctr"/>
           <a:lstStyle/>
           <a:p>
             <a:pPr algn="ctr"/>
-            <a:r>
-              <a:rPr sz="1000" b="1" spc="100">
+          </a:p>
+        </p:txBody>
+      </p:sp>
+      <p:sp>
+        <p:nvSpPr>
+          <p:cNvPr id="9" name="TextBox 8"/>
+          <p:cNvSpPr txBox="1"/>
+          <p:nvPr/>
+        </p:nvSpPr>
+        <p:spPr>
+          <a:xfrm>
+            <a:off x="941832" y="2093976"/>
+            <a:ext cx="402336" cy="402336"/>
+          </a:xfrm>
+          <a:prstGeom prst="rect">
+            <a:avLst/>
+          </a:prstGeom>
+          <a:noFill/>
+          <a:effectLst/>
+        </p:spPr>
+        <p:txBody>
+          <a:bodyPr wrap="square" lIns="0" rIns="0" tIns="0" bIns="0" anchor="t">
+            <a:spAutoFit/>
+          </a:bodyPr>
+          <a:lstStyle/>
+          <a:p>
+            <a:pPr algn="ctr"/>
+            <a:r>
+              <a:rPr sz="1400" b="0">
+                <a:solidFill>
+                  <a:srgbClr val="FFFDF7"/>
+                </a:solidFill>
+                <a:latin typeface="Georgia"/>
+              </a:rPr>
+              <a:t>1</a:t>
+            </a:r>
+          </a:p>
+        </p:txBody>
+      </p:sp>
+      <p:sp>
+        <p:nvSpPr>
+          <p:cNvPr id="10" name="TextBox 9"/>
+          <p:cNvSpPr txBox="1"/>
+          <p:nvPr/>
+        </p:nvSpPr>
+        <p:spPr>
+          <a:xfrm>
+            <a:off x="1572768" y="2020824"/>
+            <a:ext cx="6583680" cy="457200"/>
+          </a:xfrm>
+          <a:prstGeom prst="rect">
+            <a:avLst/>
+          </a:prstGeom>
+          <a:noFill/>
+          <a:effectLst/>
+        </p:spPr>
+        <p:txBody>
+          <a:bodyPr wrap="square" lIns="0" rIns="0" tIns="0" bIns="0" anchor="ctr">
+            <a:spAutoFit/>
+          </a:bodyPr>
+          <a:lstStyle/>
+          <a:p>
+            <a:pPr algn="l">
+              <a:lnSpc>
+                <a:spcPct val="110000"/>
+              </a:lnSpc>
+            </a:pPr>
+            <a:r>
+              <a:rPr sz="1400" b="0">
                 <a:solidFill>
                   <a:srgbClr val="6B4F3E"/>
                 </a:solidFill>
-                <a:latin typeface="Karla"/>
-              </a:rPr>
-              <a:t>WRITE</a:t>
-            </a:r>
-          </a:p>
-        </p:txBody>
-      </p:sp>
-      <p:sp>
-        <p:nvSpPr>
-          <p:cNvPr id="6" name="TextBox 5"/>
-          <p:cNvSpPr txBox="1"/>
-          <p:nvPr/>
-        </p:nvSpPr>
-        <p:spPr>
-          <a:xfrm>
-            <a:off x="685800" y="841248"/>
-            <a:ext cx="6309360" cy="566928"/>
-          </a:xfrm>
-          <a:prstGeom prst="rect">
-            <a:avLst/>
-          </a:prstGeom>
-          <a:noFill/>
-          <a:effectLst/>
-        </p:spPr>
-        <p:txBody>
-          <a:bodyPr wrap="square" lIns="0" rIns="0" tIns="0" bIns="0" anchor="t">
-            <a:spAutoFit/>
-          </a:bodyPr>
-          <a:lstStyle/>
-          <a:p>
-            <a:pPr algn="l"/>
-            <a:r>
-              <a:rPr sz="3100" b="1">
-                <a:solidFill>
-                  <a:srgbClr val="3A332E"/>
-                </a:solidFill>
-                <a:latin typeface="Libre Caslon Display"/>
-              </a:rPr>
-              <a:t>Two questions, for you</a:t>
-            </a:r>
-          </a:p>
-        </p:txBody>
-      </p:sp>
-      <p:sp>
-        <p:nvSpPr>
-          <p:cNvPr id="7" name="Rounded Rectangle 6"/>
+                <a:latin typeface="Georgia"/>
+              </a:rPr>
+              <a:t>Which of the five roles are you most often?</a:t>
+            </a:r>
+          </a:p>
+        </p:txBody>
+      </p:sp>
+      <p:sp>
+        <p:nvSpPr>
+          <p:cNvPr id="11" name="Rounded Rectangle 10"/>
           <p:cNvSpPr/>
           <p:nvPr/>
         </p:nvSpPr>
         <p:spPr>
           <a:xfrm>
-            <a:off x="685800" y="1874519"/>
+            <a:off x="685800" y="2660903"/>
             <a:ext cx="7772400" cy="640080"/>
           </a:xfrm>
           <a:prstGeom prst="roundRect">
@@ -8465,13 +8057,13 @@
       </p:sp>
       <p:sp>
         <p:nvSpPr>
-          <p:cNvPr id="8" name="Oval 7"/>
+          <p:cNvPr id="12" name="Oval 11"/>
           <p:cNvSpPr/>
           <p:nvPr/>
         </p:nvSpPr>
         <p:spPr>
           <a:xfrm>
-            <a:off x="941832" y="1993391"/>
+            <a:off x="941832" y="2779775"/>
             <a:ext cx="402336" cy="402336"/>
           </a:xfrm>
           <a:prstGeom prst="ellipse">
@@ -8509,13 +8101,13 @@
       </p:sp>
       <p:sp>
         <p:nvSpPr>
-          <p:cNvPr id="9" name="TextBox 8"/>
-          <p:cNvSpPr txBox="1"/>
-          <p:nvPr/>
-        </p:nvSpPr>
-        <p:spPr>
-          <a:xfrm>
-            <a:off x="941832" y="2093976"/>
+          <p:cNvPr id="13" name="TextBox 12"/>
+          <p:cNvSpPr txBox="1"/>
+          <p:nvPr/>
+        </p:nvSpPr>
+        <p:spPr>
+          <a:xfrm>
+            <a:off x="941832" y="2880359"/>
             <a:ext cx="402336" cy="402336"/>
           </a:xfrm>
           <a:prstGeom prst="rect">
@@ -8532,26 +8124,26 @@
           <a:p>
             <a:pPr algn="ctr"/>
             <a:r>
-              <a:rPr sz="1400" b="1">
+              <a:rPr sz="1400" b="0">
                 <a:solidFill>
                   <a:srgbClr val="FFFDF7"/>
                 </a:solidFill>
-                <a:latin typeface="Libre Caslon Display"/>
-              </a:rPr>
-              <a:t>1</a:t>
-            </a:r>
-          </a:p>
-        </p:txBody>
-      </p:sp>
-      <p:sp>
-        <p:nvSpPr>
-          <p:cNvPr id="10" name="TextBox 9"/>
-          <p:cNvSpPr txBox="1"/>
-          <p:nvPr/>
-        </p:nvSpPr>
-        <p:spPr>
-          <a:xfrm>
-            <a:off x="1572768" y="2020824"/>
+                <a:latin typeface="Georgia"/>
+              </a:rPr>
+              <a:t>2</a:t>
+            </a:r>
+          </a:p>
+        </p:txBody>
+      </p:sp>
+      <p:sp>
+        <p:nvSpPr>
+          <p:cNvPr id="14" name="TextBox 13"/>
+          <p:cNvSpPr txBox="1"/>
+          <p:nvPr/>
+        </p:nvSpPr>
+        <p:spPr>
+          <a:xfrm>
+            <a:off x="1572768" y="2807208"/>
             <a:ext cx="6583680" cy="457200"/>
           </a:xfrm>
           <a:prstGeom prst="rect">
@@ -8572,177 +8164,11 @@
               </a:lnSpc>
             </a:pPr>
             <a:r>
-              <a:rPr sz="1400" b="1">
+              <a:rPr sz="1400" b="0">
                 <a:solidFill>
                   <a:srgbClr val="6B4F3E"/>
                 </a:solidFill>
-                <a:latin typeface="Libre Caslon Display"/>
-              </a:rPr>
-              <a:t>Which of the five roles are you most often?</a:t>
-            </a:r>
-          </a:p>
-        </p:txBody>
-      </p:sp>
-      <p:sp>
-        <p:nvSpPr>
-          <p:cNvPr id="11" name="Rounded Rectangle 10"/>
-          <p:cNvSpPr/>
-          <p:nvPr/>
-        </p:nvSpPr>
-        <p:spPr>
-          <a:xfrm>
-            <a:off x="685800" y="2660903"/>
-            <a:ext cx="7772400" cy="640080"/>
-          </a:xfrm>
-          <a:prstGeom prst="roundRect">
-            <a:avLst>
-              <a:gd name="adj" fmla="val 12857"/>
-            </a:avLst>
-          </a:prstGeom>
-          <a:solidFill>
-            <a:srgbClr val="F0EAE3"/>
-          </a:solidFill>
-          <a:ln>
-            <a:noFill/>
-          </a:ln>
-          <a:effectLst/>
-        </p:spPr>
-        <p:style>
-          <a:lnRef idx="1">
-            <a:schemeClr val="accent1"/>
-          </a:lnRef>
-          <a:fillRef idx="3">
-            <a:schemeClr val="accent1"/>
-          </a:fillRef>
-          <a:effectRef idx="2">
-            <a:schemeClr val="accent1"/>
-          </a:effectRef>
-          <a:fontRef idx="minor">
-            <a:schemeClr val="lt1"/>
-          </a:fontRef>
-        </p:style>
-        <p:txBody>
-          <a:bodyPr rtlCol="0" anchor="ctr"/>
-          <a:lstStyle/>
-          <a:p>
-            <a:pPr algn="ctr"/>
-          </a:p>
-        </p:txBody>
-      </p:sp>
-      <p:sp>
-        <p:nvSpPr>
-          <p:cNvPr id="12" name="Oval 11"/>
-          <p:cNvSpPr/>
-          <p:nvPr/>
-        </p:nvSpPr>
-        <p:spPr>
-          <a:xfrm>
-            <a:off x="941832" y="2779775"/>
-            <a:ext cx="402336" cy="402336"/>
-          </a:xfrm>
-          <a:prstGeom prst="ellipse">
-            <a:avLst/>
-          </a:prstGeom>
-          <a:solidFill>
-            <a:srgbClr val="6B4F3E"/>
-          </a:solidFill>
-          <a:ln>
-            <a:noFill/>
-          </a:ln>
-          <a:effectLst/>
-        </p:spPr>
-        <p:style>
-          <a:lnRef idx="1">
-            <a:schemeClr val="accent1"/>
-          </a:lnRef>
-          <a:fillRef idx="3">
-            <a:schemeClr val="accent1"/>
-          </a:fillRef>
-          <a:effectRef idx="2">
-            <a:schemeClr val="accent1"/>
-          </a:effectRef>
-          <a:fontRef idx="minor">
-            <a:schemeClr val="lt1"/>
-          </a:fontRef>
-        </p:style>
-        <p:txBody>
-          <a:bodyPr rtlCol="0" anchor="ctr"/>
-          <a:lstStyle/>
-          <a:p>
-            <a:pPr algn="ctr"/>
-          </a:p>
-        </p:txBody>
-      </p:sp>
-      <p:sp>
-        <p:nvSpPr>
-          <p:cNvPr id="13" name="TextBox 12"/>
-          <p:cNvSpPr txBox="1"/>
-          <p:nvPr/>
-        </p:nvSpPr>
-        <p:spPr>
-          <a:xfrm>
-            <a:off x="941832" y="2880359"/>
-            <a:ext cx="402336" cy="402336"/>
-          </a:xfrm>
-          <a:prstGeom prst="rect">
-            <a:avLst/>
-          </a:prstGeom>
-          <a:noFill/>
-          <a:effectLst/>
-        </p:spPr>
-        <p:txBody>
-          <a:bodyPr wrap="square" lIns="0" rIns="0" tIns="0" bIns="0" anchor="t">
-            <a:spAutoFit/>
-          </a:bodyPr>
-          <a:lstStyle/>
-          <a:p>
-            <a:pPr algn="ctr"/>
-            <a:r>
-              <a:rPr sz="1400" b="1">
-                <a:solidFill>
-                  <a:srgbClr val="FFFDF7"/>
-                </a:solidFill>
-                <a:latin typeface="Libre Caslon Display"/>
-              </a:rPr>
-              <a:t>2</a:t>
-            </a:r>
-          </a:p>
-        </p:txBody>
-      </p:sp>
-      <p:sp>
-        <p:nvSpPr>
-          <p:cNvPr id="14" name="TextBox 13"/>
-          <p:cNvSpPr txBox="1"/>
-          <p:nvPr/>
-        </p:nvSpPr>
-        <p:spPr>
-          <a:xfrm>
-            <a:off x="1572768" y="2807208"/>
-            <a:ext cx="6583680" cy="457200"/>
-          </a:xfrm>
-          <a:prstGeom prst="rect">
-            <a:avLst/>
-          </a:prstGeom>
-          <a:noFill/>
-          <a:effectLst/>
-        </p:spPr>
-        <p:txBody>
-          <a:bodyPr wrap="square" lIns="0" rIns="0" tIns="0" bIns="0" anchor="ctr">
-            <a:spAutoFit/>
-          </a:bodyPr>
-          <a:lstStyle/>
-          <a:p>
-            <a:pPr algn="l">
-              <a:lnSpc>
-                <a:spcPct val="110000"/>
-              </a:lnSpc>
-            </a:pPr>
-            <a:r>
-              <a:rPr sz="1400" b="1">
-                <a:solidFill>
-                  <a:srgbClr val="6B4F3E"/>
-                </a:solidFill>
-                <a:latin typeface="Libre Caslon Display"/>
+                <a:latin typeface="Georgia"/>
               </a:rPr>
               <a:t>What is one thing you will do differently this week?</a:t>
             </a:r>
@@ -8782,7 +8208,7 @@
                 <a:solidFill>
                   <a:srgbClr val="6B4F3E"/>
                 </a:solidFill>
-                <a:latin typeface="Karla"/>
+                <a:latin typeface="Calibri"/>
               </a:rPr>
               <a:t>Write it on your sheet. Nobody collects it, so keep it or bin it on the way out.</a:t>
             </a:r>
@@ -8842,7 +8268,7 @@
                 <a:solidFill>
                   <a:srgbClr val="AAA49D"/>
                 </a:solidFill>
-                <a:latin typeface="Karla"/>
+                <a:latin typeface="Calibri"/>
               </a:rPr>
               <a:t>The Pastoral Guide</a:t>
             </a:r>
@@ -8878,7 +8304,7 @@
                 <a:solidFill>
                   <a:srgbClr val="AAA49D"/>
                 </a:solidFill>
-                <a:latin typeface="Karla"/>
+                <a:latin typeface="Calibri"/>
               </a:rPr>
               <a:t>16 / 18</a:t>
             </a:r>
@@ -8972,11 +8398,11 @@
           <a:p>
             <a:pPr algn="ctr"/>
             <a:r>
-              <a:rPr sz="3400" b="1">
+              <a:rPr sz="3400" b="0">
                 <a:solidFill>
                   <a:srgbClr val="6B4F3E"/>
                 </a:solidFill>
-                <a:latin typeface="Libre Caslon Display"/>
+                <a:latin typeface="Georgia"/>
               </a:rPr>
               <a:t>Nobody had to be brave</a:t>
             </a:r>
@@ -9060,7 +8486,7 @@
                 <a:solidFill>
                   <a:srgbClr val="706962"/>
                 </a:solidFill>
-                <a:latin typeface="Karla"/>
+                <a:latin typeface="Calibri"/>
               </a:rPr>
               <a:t>They had to stop laughing, and one of them had to say six words.</a:t>
             </a:r>
@@ -9120,7 +8546,7 @@
                 <a:solidFill>
                   <a:srgbClr val="AAA49D"/>
                 </a:solidFill>
-                <a:latin typeface="Karla"/>
+                <a:latin typeface="Calibri"/>
               </a:rPr>
               <a:t>The Pastoral Guide</a:t>
             </a:r>
@@ -9156,7 +8582,7 @@
                 <a:solidFill>
                   <a:srgbClr val="AAA49D"/>
                 </a:solidFill>
-                <a:latin typeface="Karla"/>
+                <a:latin typeface="Calibri"/>
               </a:rPr>
               <a:t>17 / 18</a:t>
             </a:r>
@@ -9254,91 +8680,9 @@
                 <a:solidFill>
                   <a:srgbClr val="A3897A"/>
                 </a:solidFill>
-                <a:latin typeface="Karla"/>
+                <a:latin typeface="Calibri"/>
               </a:rPr>
               <a:t>FOR THE TEACHER</a:t>
-            </a:r>
-          </a:p>
-        </p:txBody>
-      </p:sp>
-      <p:sp>
-        <p:nvSpPr>
-          <p:cNvPr id="4" name="Rounded Rectangle 3"/>
-          <p:cNvSpPr/>
-          <p:nvPr/>
-        </p:nvSpPr>
-        <p:spPr>
-          <a:xfrm>
-            <a:off x="7543800" y="530352"/>
-            <a:ext cx="914400" cy="347472"/>
-          </a:xfrm>
-          <a:prstGeom prst="roundRect">
-            <a:avLst>
-              <a:gd name="adj" fmla="val 50000"/>
-            </a:avLst>
-          </a:prstGeom>
-          <a:solidFill>
-            <a:srgbClr val="F0EAE3"/>
-          </a:solidFill>
-          <a:ln>
-            <a:noFill/>
-          </a:ln>
-          <a:effectLst/>
-        </p:spPr>
-        <p:style>
-          <a:lnRef idx="1">
-            <a:schemeClr val="accent1"/>
-          </a:lnRef>
-          <a:fillRef idx="3">
-            <a:schemeClr val="accent1"/>
-          </a:fillRef>
-          <a:effectRef idx="2">
-            <a:schemeClr val="accent1"/>
-          </a:effectRef>
-          <a:fontRef idx="minor">
-            <a:schemeClr val="lt1"/>
-          </a:fontRef>
-        </p:style>
-        <p:txBody>
-          <a:bodyPr rtlCol="0" anchor="ctr"/>
-          <a:lstStyle/>
-          <a:p>
-            <a:pPr algn="ctr"/>
-          </a:p>
-        </p:txBody>
-      </p:sp>
-      <p:sp>
-        <p:nvSpPr>
-          <p:cNvPr id="5" name="TextBox 4"/>
-          <p:cNvSpPr txBox="1"/>
-          <p:nvPr/>
-        </p:nvSpPr>
-        <p:spPr>
-          <a:xfrm>
-            <a:off x="7543800" y="594360"/>
-            <a:ext cx="914400" cy="237744"/>
-          </a:xfrm>
-          <a:prstGeom prst="rect">
-            <a:avLst/>
-          </a:prstGeom>
-          <a:noFill/>
-          <a:effectLst/>
-        </p:spPr>
-        <p:txBody>
-          <a:bodyPr wrap="square" lIns="0" rIns="0" tIns="0" bIns="0" anchor="t">
-            <a:spAutoFit/>
-          </a:bodyPr>
-          <a:lstStyle/>
-          <a:p>
-            <a:pPr algn="ctr"/>
-            <a:r>
-              <a:rPr sz="1000" b="1" spc="100">
-                <a:solidFill>
-                  <a:srgbClr val="6B4F3E"/>
-                </a:solidFill>
-                <a:latin typeface="Karla"/>
-              </a:rPr>
-              <a:t>SOURCES</a:t>
             </a:r>
           </a:p>
         </p:txBody>
@@ -9368,11 +8712,11 @@
           <a:p>
             <a:pPr algn="l"/>
             <a:r>
-              <a:rPr sz="3100" b="1">
+              <a:rPr sz="3100" b="0">
                 <a:solidFill>
                   <a:srgbClr val="3A332E"/>
                 </a:solidFill>
-                <a:latin typeface="Libre Caslon Display"/>
+                <a:latin typeface="Georgia"/>
               </a:rPr>
               <a:t>Where these came from</a:t>
             </a:r>
@@ -9408,7 +8752,7 @@
                 <a:solidFill>
                   <a:srgbClr val="6B4F3E"/>
                 </a:solidFill>
-                <a:latin typeface="Karla"/>
+                <a:latin typeface="Calibri"/>
               </a:rPr>
               <a:t>Salmivalli, C., Björkqvist, K., Lagerspetz, K., Österman, K. and Kaukiainen, A. (1996).</a:t>
             </a:r>
@@ -9448,7 +8792,7 @@
                 <a:solidFill>
                   <a:srgbClr val="706962"/>
                 </a:solidFill>
-                <a:latin typeface="Karla"/>
+                <a:latin typeface="Calibri"/>
               </a:rPr>
               <a:t>Bullying as a group process: participant roles and their relations to social status within the group. Aggressive Behavior, 22, 1 to 15.</a:t>
             </a:r>
@@ -9488,7 +8832,7 @@
                 <a:solidFill>
                   <a:srgbClr val="706962"/>
                 </a:solidFill>
-                <a:latin typeface="Karla"/>
+                <a:latin typeface="Calibri"/>
               </a:rPr>
               <a:t>573 students aged twelve and thirteen in Finland. Almost everyone in a class holds a role, and the largest of them is the one that laughs, encourages or is simply the audience.</a:t>
             </a:r>
@@ -9524,7 +8868,7 @@
                 <a:solidFill>
                   <a:srgbClr val="6B4F3E"/>
                 </a:solidFill>
-                <a:latin typeface="Karla"/>
+                <a:latin typeface="Calibri"/>
               </a:rPr>
               <a:t>Hawkins, D. L., Pepler, D. J. and Craig, W. M. (2001).</a:t>
             </a:r>
@@ -9564,7 +8908,7 @@
                 <a:solidFill>
                   <a:srgbClr val="706962"/>
                 </a:solidFill>
-                <a:latin typeface="Karla"/>
+                <a:latin typeface="Calibri"/>
               </a:rPr>
               <a:t>Naturalistic observations of peer interventions in bullying. Social Development, 10(4), 512 to 527.</a:t>
             </a:r>
@@ -9604,7 +8948,7 @@
                 <a:solidFill>
                   <a:srgbClr val="706962"/>
                 </a:solidFill>
-                <a:latin typeface="Karla"/>
+                <a:latin typeface="Calibri"/>
               </a:rPr>
               <a:t>306 bullying episodes recorded across 125 hours of playground footage at two schools in Toronto. Another child stepped in during 19 per cent of them, and when they did, the bullying stopped within ten seconds 57 per cent of the time.</a:t>
             </a:r>
@@ -9640,7 +8984,7 @@
                 <a:solidFill>
                   <a:srgbClr val="6B4F3E"/>
                 </a:solidFill>
-                <a:latin typeface="Karla"/>
+                <a:latin typeface="Calibri"/>
               </a:rPr>
               <a:t>Chen, Q., Lin, W., Wu, Q. and Chan, K. L. (2025).</a:t>
             </a:r>
@@ -9680,7 +9024,7 @@
                 <a:solidFill>
                   <a:srgbClr val="706962"/>
                 </a:solidFill>
-                <a:latin typeface="Karla"/>
+                <a:latin typeface="Calibri"/>
               </a:rPr>
               <a:t>The effectiveness of interventions on bullying and cyberbullying bystander: a meta-analysis. Trauma, Violence, and Abuse, 26(5), 938 to 954.</a:t>
             </a:r>
@@ -9720,7 +9064,7 @@
                 <a:solidFill>
                   <a:srgbClr val="706962"/>
                 </a:solidFill>
-                <a:latin typeface="Karla"/>
+                <a:latin typeface="Calibri"/>
               </a:rPr>
               <a:t>49 studies pulled together. Teaching bystanders what to do does change what they do, and the programmes that worked best taught specific words rather than attitudes.</a:t>
             </a:r>
@@ -9780,7 +9124,7 @@
                 <a:solidFill>
                   <a:srgbClr val="AAA49D"/>
                 </a:solidFill>
-                <a:latin typeface="Karla"/>
+                <a:latin typeface="Calibri"/>
               </a:rPr>
               <a:t>The Pastoral Guide</a:t>
             </a:r>
@@ -9816,7 +9160,7 @@
                 <a:solidFill>
                   <a:srgbClr val="AAA49D"/>
                 </a:solidFill>
-                <a:latin typeface="Karla"/>
+                <a:latin typeface="Calibri"/>
               </a:rPr>
               <a:t>18 / 18</a:t>
             </a:r>
@@ -9914,7 +9258,7 @@
                 <a:solidFill>
                   <a:srgbClr val="A3897A"/>
                 </a:solidFill>
-                <a:latin typeface="Karla"/>
+                <a:latin typeface="Calibri"/>
               </a:rPr>
               <a:t>TODAY</a:t>
             </a:r>
@@ -9946,11 +9290,11 @@
           <a:p>
             <a:pPr algn="ctr"/>
             <a:r>
-              <a:rPr sz="3100" b="1">
+              <a:rPr sz="3100" b="0">
                 <a:solidFill>
                   <a:srgbClr val="3A332E"/>
                 </a:solidFill>
-                <a:latin typeface="Libre Caslon Display"/>
+                <a:latin typeface="Georgia"/>
               </a:rPr>
               <a:t>Five things, in this order</a:t>
             </a:r>
@@ -10072,11 +9416,11 @@
           <a:p>
             <a:pPr algn="ctr"/>
             <a:r>
-              <a:rPr sz="1800" b="1">
+              <a:rPr sz="1800" b="0">
                 <a:solidFill>
                   <a:srgbClr val="FFFDF7"/>
                 </a:solidFill>
-                <a:latin typeface="Libre Caslon Display"/>
+                <a:latin typeface="Georgia"/>
               </a:rPr>
               <a:t>1</a:t>
             </a:r>
@@ -10112,11 +9456,11 @@
               </a:lnSpc>
             </a:pPr>
             <a:r>
-              <a:rPr sz="1500" b="1">
+              <a:rPr sz="1500" b="0">
                 <a:solidFill>
                   <a:srgbClr val="6B4F3E"/>
                 </a:solidFill>
-                <a:latin typeface="Libre Caslon Display"/>
+                <a:latin typeface="Georgia"/>
               </a:rPr>
               <a:t>Count</a:t>
             </a:r>
@@ -10156,7 +9500,7 @@
                 <a:solidFill>
                   <a:srgbClr val="706962"/>
                 </a:solidFill>
-                <a:latin typeface="Karla"/>
+                <a:latin typeface="Calibri"/>
               </a:rPr>
               <a:t>How many people were in one moment?</a:t>
             </a:r>
@@ -10278,11 +9622,11 @@
           <a:p>
             <a:pPr algn="ctr"/>
             <a:r>
-              <a:rPr sz="1800" b="1">
+              <a:rPr sz="1800" b="0">
                 <a:solidFill>
                   <a:srgbClr val="FFFDF7"/>
                 </a:solidFill>
-                <a:latin typeface="Libre Caslon Display"/>
+                <a:latin typeface="Georgia"/>
               </a:rPr>
               <a:t>2</a:t>
             </a:r>
@@ -10318,11 +9662,11 @@
               </a:lnSpc>
             </a:pPr>
             <a:r>
-              <a:rPr sz="1500" b="1">
+              <a:rPr sz="1500" b="0">
                 <a:solidFill>
                   <a:srgbClr val="6B4F3E"/>
                 </a:solidFill>
-                <a:latin typeface="Libre Caslon Display"/>
+                <a:latin typeface="Georgia"/>
               </a:rPr>
               <a:t>Learn</a:t>
             </a:r>
@@ -10362,7 +9706,7 @@
                 <a:solidFill>
                   <a:srgbClr val="706962"/>
                 </a:solidFill>
-                <a:latin typeface="Karla"/>
+                <a:latin typeface="Calibri"/>
               </a:rPr>
               <a:t>The five roles a group falls into.</a:t>
             </a:r>
@@ -10484,11 +9828,11 @@
           <a:p>
             <a:pPr algn="ctr"/>
             <a:r>
-              <a:rPr sz="1800" b="1">
+              <a:rPr sz="1800" b="0">
                 <a:solidFill>
                   <a:srgbClr val="FFFDF7"/>
                 </a:solidFill>
-                <a:latin typeface="Libre Caslon Display"/>
+                <a:latin typeface="Georgia"/>
               </a:rPr>
               <a:t>3</a:t>
             </a:r>
@@ -10524,11 +9868,11 @@
               </a:lnSpc>
             </a:pPr>
             <a:r>
-              <a:rPr sz="1500" b="1">
+              <a:rPr sz="1500" b="0">
                 <a:solidFill>
                   <a:srgbClr val="6B4F3E"/>
                 </a:solidFill>
-                <a:latin typeface="Libre Caslon Display"/>
+                <a:latin typeface="Georgia"/>
               </a:rPr>
               <a:t>Predict</a:t>
             </a:r>
@@ -10568,7 +9912,7 @@
                 <a:solidFill>
                   <a:srgbClr val="706962"/>
                 </a:solidFill>
-                <a:latin typeface="Karla"/>
+                <a:latin typeface="Calibri"/>
               </a:rPr>
               <a:t>What happened when somebody stepped in.</a:t>
             </a:r>
@@ -10690,11 +10034,11 @@
           <a:p>
             <a:pPr algn="ctr"/>
             <a:r>
-              <a:rPr sz="1800" b="1">
+              <a:rPr sz="1800" b="0">
                 <a:solidFill>
                   <a:srgbClr val="FFFDF7"/>
                 </a:solidFill>
-                <a:latin typeface="Libre Caslon Display"/>
+                <a:latin typeface="Georgia"/>
               </a:rPr>
               <a:t>4</a:t>
             </a:r>
@@ -10730,11 +10074,11 @@
               </a:lnSpc>
             </a:pPr>
             <a:r>
-              <a:rPr sz="1500" b="1">
+              <a:rPr sz="1500" b="0">
                 <a:solidFill>
                   <a:srgbClr val="6B4F3E"/>
                 </a:solidFill>
-                <a:latin typeface="Libre Caslon Display"/>
+                <a:latin typeface="Georgia"/>
               </a:rPr>
               <a:t>Practise</a:t>
             </a:r>
@@ -10774,7 +10118,7 @@
                 <a:solidFill>
                   <a:srgbClr val="706962"/>
                 </a:solidFill>
-                <a:latin typeface="Karla"/>
+                <a:latin typeface="Calibri"/>
               </a:rPr>
               <a:t>The words you would actually say.</a:t>
             </a:r>
@@ -10896,11 +10240,11 @@
           <a:p>
             <a:pPr algn="ctr"/>
             <a:r>
-              <a:rPr sz="1800" b="1">
+              <a:rPr sz="1800" b="0">
                 <a:solidFill>
                   <a:srgbClr val="FFFDF7"/>
                 </a:solidFill>
-                <a:latin typeface="Libre Caslon Display"/>
+                <a:latin typeface="Georgia"/>
               </a:rPr>
               <a:t>5</a:t>
             </a:r>
@@ -10936,11 +10280,11 @@
               </a:lnSpc>
             </a:pPr>
             <a:r>
-              <a:rPr sz="1500" b="1">
+              <a:rPr sz="1500" b="0">
                 <a:solidFill>
                   <a:srgbClr val="6B4F3E"/>
                 </a:solidFill>
-                <a:latin typeface="Libre Caslon Display"/>
+                <a:latin typeface="Georgia"/>
               </a:rPr>
               <a:t>Write</a:t>
             </a:r>
@@ -10980,7 +10324,7 @@
                 <a:solidFill>
                   <a:srgbClr val="706962"/>
                 </a:solidFill>
-                <a:latin typeface="Karla"/>
+                <a:latin typeface="Calibri"/>
               </a:rPr>
               <a:t>One thing you will do differently.</a:t>
             </a:r>
@@ -11020,7 +10364,7 @@
                 <a:solidFill>
                   <a:srgbClr val="6B4F3E"/>
                 </a:solidFill>
-                <a:latin typeface="Karla"/>
+                <a:latin typeface="Calibri"/>
               </a:rPr>
               <a:t>Nothing you write today gets read out or handed in.</a:t>
             </a:r>
@@ -11080,7 +10424,7 @@
                 <a:solidFill>
                   <a:srgbClr val="AAA49D"/>
                 </a:solidFill>
-                <a:latin typeface="Karla"/>
+                <a:latin typeface="Calibri"/>
               </a:rPr>
               <a:t>The Pastoral Guide</a:t>
             </a:r>
@@ -11116,7 +10460,7 @@
                 <a:solidFill>
                   <a:srgbClr val="AAA49D"/>
                 </a:solidFill>
-                <a:latin typeface="Karla"/>
+                <a:latin typeface="Calibri"/>
               </a:rPr>
               <a:t>2 / 18</a:t>
             </a:r>
@@ -11214,91 +10558,9 @@
                 <a:solidFill>
                   <a:srgbClr val="A3897A"/>
                 </a:solidFill>
-                <a:latin typeface="Karla"/>
+                <a:latin typeface="Calibri"/>
               </a:rPr>
               <a:t>COUNT THE PEOPLE</a:t>
-            </a:r>
-          </a:p>
-        </p:txBody>
-      </p:sp>
-      <p:sp>
-        <p:nvSpPr>
-          <p:cNvPr id="4" name="Rounded Rectangle 3"/>
-          <p:cNvSpPr/>
-          <p:nvPr/>
-        </p:nvSpPr>
-        <p:spPr>
-          <a:xfrm>
-            <a:off x="7543800" y="530352"/>
-            <a:ext cx="914400" cy="347472"/>
-          </a:xfrm>
-          <a:prstGeom prst="roundRect">
-            <a:avLst>
-              <a:gd name="adj" fmla="val 50000"/>
-            </a:avLst>
-          </a:prstGeom>
-          <a:solidFill>
-            <a:srgbClr val="F0EAE3"/>
-          </a:solidFill>
-          <a:ln>
-            <a:noFill/>
-          </a:ln>
-          <a:effectLst/>
-        </p:spPr>
-        <p:style>
-          <a:lnRef idx="1">
-            <a:schemeClr val="accent1"/>
-          </a:lnRef>
-          <a:fillRef idx="3">
-            <a:schemeClr val="accent1"/>
-          </a:fillRef>
-          <a:effectRef idx="2">
-            <a:schemeClr val="accent1"/>
-          </a:effectRef>
-          <a:fontRef idx="minor">
-            <a:schemeClr val="lt1"/>
-          </a:fontRef>
-        </p:style>
-        <p:txBody>
-          <a:bodyPr rtlCol="0" anchor="ctr"/>
-          <a:lstStyle/>
-          <a:p>
-            <a:pPr algn="ctr"/>
-          </a:p>
-        </p:txBody>
-      </p:sp>
-      <p:sp>
-        <p:nvSpPr>
-          <p:cNvPr id="5" name="TextBox 4"/>
-          <p:cNvSpPr txBox="1"/>
-          <p:nvPr/>
-        </p:nvSpPr>
-        <p:spPr>
-          <a:xfrm>
-            <a:off x="7543800" y="594360"/>
-            <a:ext cx="914400" cy="237744"/>
-          </a:xfrm>
-          <a:prstGeom prst="rect">
-            <a:avLst/>
-          </a:prstGeom>
-          <a:noFill/>
-          <a:effectLst/>
-        </p:spPr>
-        <p:txBody>
-          <a:bodyPr wrap="square" lIns="0" rIns="0" tIns="0" bIns="0" anchor="t">
-            <a:spAutoFit/>
-          </a:bodyPr>
-          <a:lstStyle/>
-          <a:p>
-            <a:pPr algn="ctr"/>
-            <a:r>
-              <a:rPr sz="1000" b="1" spc="100">
-                <a:solidFill>
-                  <a:srgbClr val="6B4F3E"/>
-                </a:solidFill>
-                <a:latin typeface="Karla"/>
-              </a:rPr>
-              <a:t>STARTER</a:t>
             </a:r>
           </a:p>
         </p:txBody>
@@ -11328,11 +10590,11 @@
           <a:p>
             <a:pPr algn="l"/>
             <a:r>
-              <a:rPr sz="3100" b="1">
+              <a:rPr sz="3100" b="0">
                 <a:solidFill>
                   <a:srgbClr val="3A332E"/>
                 </a:solidFill>
-                <a:latin typeface="Libre Caslon Display"/>
+                <a:latin typeface="Georgia"/>
               </a:rPr>
               <a:t>Who was in this?</a:t>
             </a:r>
@@ -11418,7 +10680,7 @@
                 <a:solidFill>
                   <a:srgbClr val="3A332E"/>
                 </a:solidFill>
-                <a:latin typeface="Libre Caslon Display"/>
+                <a:latin typeface="Georgia"/>
               </a:rPr>
               <a:t>Tuesday, outside the science block.</a:t>
             </a:r>
@@ -11428,7 +10690,7 @@
                 <a:solidFill>
                   <a:srgbClr val="3A332E"/>
                 </a:solidFill>
-                <a:latin typeface="Libre Caslon Display"/>
+                <a:latin typeface="Georgia"/>
               </a:rPr>
               <a:t>Nadia answers a question in the lesson and gets it wrong.</a:t>
             </a:r>
@@ -11438,7 +10700,7 @@
                 <a:solidFill>
                   <a:srgbClr val="3A332E"/>
                 </a:solidFill>
-                <a:latin typeface="Libre Caslon Display"/>
+                <a:latin typeface="Georgia"/>
               </a:rPr>
               <a:t>Theo repeats it at break, in her voice, and three people laugh.</a:t>
             </a:r>
@@ -11448,7 +10710,7 @@
                 <a:solidFill>
                   <a:srgbClr val="3A332E"/>
                 </a:solidFill>
-                <a:latin typeface="Libre Caslon Display"/>
+                <a:latin typeface="Georgia"/>
               </a:rPr>
               <a:t>Later, Kai hears it, laughs, and says it again to a different group at lunch.</a:t>
             </a:r>
@@ -11458,7 +10720,7 @@
                 <a:solidFill>
                   <a:srgbClr val="3A332E"/>
                 </a:solidFill>
-                <a:latin typeface="Libre Caslon Display"/>
+                <a:latin typeface="Georgia"/>
               </a:rPr>
               <a:t>By Thursday two people who were not there are saying it.</a:t>
             </a:r>
@@ -11468,7 +10730,7 @@
                 <a:solidFill>
                   <a:srgbClr val="3A332E"/>
                 </a:solidFill>
-                <a:latin typeface="Libre Caslon Display"/>
+                <a:latin typeface="Georgia"/>
               </a:rPr>
               <a:t>On Friday, Nadia stops answering questions in that lesson.</a:t>
             </a:r>
@@ -11508,7 +10770,7 @@
                 <a:solidFill>
                   <a:srgbClr val="6B4F3E"/>
                 </a:solidFill>
-                <a:latin typeface="Karla"/>
+                <a:latin typeface="Calibri"/>
               </a:rPr>
               <a:t>In pairs, two minutes: write down everybody who was part of what happened.</a:t>
             </a:r>
@@ -11548,7 +10810,7 @@
                 <a:solidFill>
                   <a:srgbClr val="706962"/>
                 </a:solidFill>
-                <a:latin typeface="Karla"/>
+                <a:latin typeface="Calibri"/>
               </a:rPr>
               <a:t>Names, or just how many. You will need your list in a minute.</a:t>
             </a:r>
@@ -11608,7 +10870,7 @@
                 <a:solidFill>
                   <a:srgbClr val="AAA49D"/>
                 </a:solidFill>
-                <a:latin typeface="Karla"/>
+                <a:latin typeface="Calibri"/>
               </a:rPr>
               <a:t>The Pastoral Guide</a:t>
             </a:r>
@@ -11644,7 +10906,7 @@
                 <a:solidFill>
                   <a:srgbClr val="AAA49D"/>
                 </a:solidFill>
-                <a:latin typeface="Karla"/>
+                <a:latin typeface="Calibri"/>
               </a:rPr>
               <a:t>3 / 18</a:t>
             </a:r>
@@ -11742,91 +11004,9 @@
                 <a:solidFill>
                   <a:srgbClr val="A3897A"/>
                 </a:solidFill>
-                <a:latin typeface="Karla"/>
+                <a:latin typeface="Calibri"/>
               </a:rPr>
               <a:t>FEEDBACK</a:t>
-            </a:r>
-          </a:p>
-        </p:txBody>
-      </p:sp>
-      <p:sp>
-        <p:nvSpPr>
-          <p:cNvPr id="4" name="Rounded Rectangle 3"/>
-          <p:cNvSpPr/>
-          <p:nvPr/>
-        </p:nvSpPr>
-        <p:spPr>
-          <a:xfrm>
-            <a:off x="7543800" y="530352"/>
-            <a:ext cx="914400" cy="347472"/>
-          </a:xfrm>
-          <a:prstGeom prst="roundRect">
-            <a:avLst>
-              <a:gd name="adj" fmla="val 50000"/>
-            </a:avLst>
-          </a:prstGeom>
-          <a:solidFill>
-            <a:srgbClr val="F0EAE3"/>
-          </a:solidFill>
-          <a:ln>
-            <a:noFill/>
-          </a:ln>
-          <a:effectLst/>
-        </p:spPr>
-        <p:style>
-          <a:lnRef idx="1">
-            <a:schemeClr val="accent1"/>
-          </a:lnRef>
-          <a:fillRef idx="3">
-            <a:schemeClr val="accent1"/>
-          </a:fillRef>
-          <a:effectRef idx="2">
-            <a:schemeClr val="accent1"/>
-          </a:effectRef>
-          <a:fontRef idx="minor">
-            <a:schemeClr val="lt1"/>
-          </a:fontRef>
-        </p:style>
-        <p:txBody>
-          <a:bodyPr rtlCol="0" anchor="ctr"/>
-          <a:lstStyle/>
-          <a:p>
-            <a:pPr algn="ctr"/>
-          </a:p>
-        </p:txBody>
-      </p:sp>
-      <p:sp>
-        <p:nvSpPr>
-          <p:cNvPr id="5" name="TextBox 4"/>
-          <p:cNvSpPr txBox="1"/>
-          <p:nvPr/>
-        </p:nvSpPr>
-        <p:spPr>
-          <a:xfrm>
-            <a:off x="7543800" y="594360"/>
-            <a:ext cx="914400" cy="237744"/>
-          </a:xfrm>
-          <a:prstGeom prst="rect">
-            <a:avLst/>
-          </a:prstGeom>
-          <a:noFill/>
-          <a:effectLst/>
-        </p:spPr>
-        <p:txBody>
-          <a:bodyPr wrap="square" lIns="0" rIns="0" tIns="0" bIns="0" anchor="t">
-            <a:spAutoFit/>
-          </a:bodyPr>
-          <a:lstStyle/>
-          <a:p>
-            <a:pPr algn="ctr"/>
-            <a:r>
-              <a:rPr sz="1000" b="1" spc="100">
-                <a:solidFill>
-                  <a:srgbClr val="6B4F3E"/>
-                </a:solidFill>
-                <a:latin typeface="Karla"/>
-              </a:rPr>
-              <a:t>COUNT</a:t>
             </a:r>
           </a:p>
         </p:txBody>
@@ -11856,11 +11036,11 @@
           <a:p>
             <a:pPr algn="l"/>
             <a:r>
-              <a:rPr sz="3100" b="1">
+              <a:rPr sz="3100" b="0">
                 <a:solidFill>
                   <a:srgbClr val="3A332E"/>
                 </a:solidFill>
-                <a:latin typeface="Libre Caslon Display"/>
+                <a:latin typeface="Georgia"/>
               </a:rPr>
               <a:t>Eight people</a:t>
             </a:r>
@@ -11982,11 +11162,11 @@
           <a:p>
             <a:pPr algn="ctr"/>
             <a:r>
-              <a:rPr sz="1800" b="1">
+              <a:rPr sz="1800" b="0">
                 <a:solidFill>
                   <a:srgbClr val="FFFDF7"/>
                 </a:solidFill>
-                <a:latin typeface="Libre Caslon Display"/>
+                <a:latin typeface="Georgia"/>
               </a:rPr>
               <a:t>1</a:t>
             </a:r>
@@ -12022,11 +11202,11 @@
               </a:lnSpc>
             </a:pPr>
             <a:r>
-              <a:rPr sz="1250" b="1">
+              <a:rPr sz="1250" b="0">
                 <a:solidFill>
                   <a:srgbClr val="6B4F3E"/>
                 </a:solidFill>
-                <a:latin typeface="Libre Caslon Display"/>
+                <a:latin typeface="Georgia"/>
               </a:rPr>
               <a:t>started it</a:t>
             </a:r>
@@ -12066,7 +11246,7 @@
                 <a:solidFill>
                   <a:srgbClr val="706962"/>
                 </a:solidFill>
-                <a:latin typeface="Karla"/>
+                <a:latin typeface="Calibri"/>
               </a:rPr>
               <a:t>Theo, once, at break.</a:t>
             </a:r>
@@ -12188,11 +11368,11 @@
           <a:p>
             <a:pPr algn="ctr"/>
             <a:r>
-              <a:rPr sz="1800" b="1">
+              <a:rPr sz="1800" b="0">
                 <a:solidFill>
                   <a:srgbClr val="FFFDF7"/>
                 </a:solidFill>
-                <a:latin typeface="Libre Caslon Display"/>
+                <a:latin typeface="Georgia"/>
               </a:rPr>
               <a:t>3</a:t>
             </a:r>
@@ -12228,11 +11408,11 @@
               </a:lnSpc>
             </a:pPr>
             <a:r>
-              <a:rPr sz="1250" b="1">
+              <a:rPr sz="1250" b="0">
                 <a:solidFill>
                   <a:srgbClr val="6B4F3E"/>
                 </a:solidFill>
-                <a:latin typeface="Libre Caslon Display"/>
+                <a:latin typeface="Georgia"/>
               </a:rPr>
               <a:t>laughed</a:t>
             </a:r>
@@ -12272,7 +11452,7 @@
                 <a:solidFill>
                   <a:srgbClr val="706962"/>
                 </a:solidFill>
-                <a:latin typeface="Karla"/>
+                <a:latin typeface="Calibri"/>
               </a:rPr>
               <a:t>The three at break. Without them it ends there.</a:t>
             </a:r>
@@ -12394,11 +11574,11 @@
           <a:p>
             <a:pPr algn="ctr"/>
             <a:r>
-              <a:rPr sz="1800" b="1">
+              <a:rPr sz="1800" b="0">
                 <a:solidFill>
                   <a:srgbClr val="FFFDF7"/>
                 </a:solidFill>
-                <a:latin typeface="Libre Caslon Display"/>
+                <a:latin typeface="Georgia"/>
               </a:rPr>
               <a:t>1</a:t>
             </a:r>
@@ -12434,11 +11614,11 @@
               </a:lnSpc>
             </a:pPr>
             <a:r>
-              <a:rPr sz="1250" b="1">
+              <a:rPr sz="1250" b="0">
                 <a:solidFill>
                   <a:srgbClr val="6B4F3E"/>
                 </a:solidFill>
-                <a:latin typeface="Libre Caslon Display"/>
+                <a:latin typeface="Georgia"/>
               </a:rPr>
               <a:t>passed it on</a:t>
             </a:r>
@@ -12478,7 +11658,7 @@
                 <a:solidFill>
                   <a:srgbClr val="706962"/>
                 </a:solidFill>
-                <a:latin typeface="Karla"/>
+                <a:latin typeface="Calibri"/>
               </a:rPr>
               <a:t>Kai, to a group who had not heard it.</a:t>
             </a:r>
@@ -12600,11 +11780,11 @@
           <a:p>
             <a:pPr algn="ctr"/>
             <a:r>
-              <a:rPr sz="1800" b="1">
+              <a:rPr sz="1800" b="0">
                 <a:solidFill>
                   <a:srgbClr val="FFFDF7"/>
                 </a:solidFill>
-                <a:latin typeface="Libre Caslon Display"/>
+                <a:latin typeface="Georgia"/>
               </a:rPr>
               <a:t>2</a:t>
             </a:r>
@@ -12640,11 +11820,11 @@
               </a:lnSpc>
             </a:pPr>
             <a:r>
-              <a:rPr sz="1250" b="1">
+              <a:rPr sz="1250" b="0">
                 <a:solidFill>
                   <a:srgbClr val="6B4F3E"/>
                 </a:solidFill>
-                <a:latin typeface="Libre Caslon Display"/>
+                <a:latin typeface="Georgia"/>
               </a:rPr>
               <a:t>were never there</a:t>
             </a:r>
@@ -12684,7 +11864,7 @@
                 <a:solidFill>
                   <a:srgbClr val="706962"/>
                 </a:solidFill>
-                <a:latin typeface="Karla"/>
+                <a:latin typeface="Calibri"/>
               </a:rPr>
               <a:t>They repeated it anyway, by Thursday.</a:t>
             </a:r>
@@ -12806,11 +11986,11 @@
           <a:p>
             <a:pPr algn="ctr"/>
             <a:r>
-              <a:rPr sz="1800" b="1">
+              <a:rPr sz="1800" b="0">
                 <a:solidFill>
                   <a:srgbClr val="FFFDF7"/>
                 </a:solidFill>
-                <a:latin typeface="Libre Caslon Display"/>
+                <a:latin typeface="Georgia"/>
               </a:rPr>
               <a:t>1</a:t>
             </a:r>
@@ -12846,11 +12026,11 @@
               </a:lnSpc>
             </a:pPr>
             <a:r>
-              <a:rPr sz="1250" b="1">
+              <a:rPr sz="1250" b="0">
                 <a:solidFill>
                   <a:srgbClr val="6B4F3E"/>
                 </a:solidFill>
-                <a:latin typeface="Libre Caslon Display"/>
+                <a:latin typeface="Georgia"/>
               </a:rPr>
               <a:t>stopped answering</a:t>
             </a:r>
@@ -12890,7 +12070,7 @@
                 <a:solidFill>
                   <a:srgbClr val="706962"/>
                 </a:solidFill>
-                <a:latin typeface="Karla"/>
+                <a:latin typeface="Calibri"/>
               </a:rPr>
               <a:t>Nadia, by Friday.</a:t>
             </a:r>
@@ -12930,7 +12110,7 @@
                 <a:solidFill>
                   <a:srgbClr val="706962"/>
                 </a:solidFill>
-                <a:latin typeface="Karla"/>
+                <a:latin typeface="Calibri"/>
               </a:rPr>
               <a:t>One of them started it. Most forms count two: the one who said it and the one it was about.</a:t>
             </a:r>
@@ -12990,7 +12170,7 @@
                 <a:solidFill>
                   <a:srgbClr val="AAA49D"/>
                 </a:solidFill>
-                <a:latin typeface="Karla"/>
+                <a:latin typeface="Calibri"/>
               </a:rPr>
               <a:t>The Pastoral Guide</a:t>
             </a:r>
@@ -13026,7 +12206,7 @@
                 <a:solidFill>
                   <a:srgbClr val="AAA49D"/>
                 </a:solidFill>
-                <a:latin typeface="Karla"/>
+                <a:latin typeface="Calibri"/>
               </a:rPr>
               <a:t>4 / 18</a:t>
             </a:r>
@@ -13124,7 +12304,7 @@
                 <a:solidFill>
                   <a:srgbClr val="A3897A"/>
                 </a:solidFill>
-                <a:latin typeface="Karla"/>
+                <a:latin typeface="Calibri"/>
               </a:rPr>
               <a:t>THINK</a:t>
             </a:r>
@@ -13156,11 +12336,11 @@
           <a:p>
             <a:pPr algn="l"/>
             <a:r>
-              <a:rPr sz="3100" b="1">
+              <a:rPr sz="3100" b="0">
                 <a:solidFill>
                   <a:srgbClr val="3A332E"/>
                 </a:solidFill>
-                <a:latin typeface="Libre Caslon Display"/>
+                <a:latin typeface="Georgia"/>
               </a:rPr>
               <a:t>You already know this</a:t>
             </a:r>
@@ -13246,7 +12426,7 @@
                 <a:solidFill>
                   <a:srgbClr val="3A332E"/>
                 </a:solidFill>
-                <a:latin typeface="Libre Caslon Display"/>
+                <a:latin typeface="Georgia"/>
               </a:rPr>
               <a:t>Most people have laughed at something without deciding to.</a:t>
             </a:r>
@@ -13256,7 +12436,7 @@
                 <a:solidFill>
                   <a:srgbClr val="3A332E"/>
                 </a:solidFill>
-                <a:latin typeface="Libre Caslon Display"/>
+                <a:latin typeface="Georgia"/>
               </a:rPr>
               <a:t>Most people have walked towards a group and heard it go quiet.</a:t>
             </a:r>
@@ -13266,7 +12446,7 @@
                 <a:solidFill>
                   <a:srgbClr val="3A332E"/>
                 </a:solidFill>
-                <a:latin typeface="Libre Caslon Display"/>
+                <a:latin typeface="Georgia"/>
               </a:rPr>
               <a:t>Most people have watched something and assumed somebody else would say it.</a:t>
             </a:r>
@@ -13306,7 +12486,7 @@
                 <a:solidFill>
                   <a:srgbClr val="6B4F3E"/>
                 </a:solidFill>
-                <a:latin typeface="Karla"/>
+                <a:latin typeface="Calibri"/>
               </a:rPr>
               <a:t>None of that makes you the one who started it, and all of it is part of why it kept going.</a:t>
             </a:r>
@@ -13366,7 +12546,7 @@
                 <a:solidFill>
                   <a:srgbClr val="AAA49D"/>
                 </a:solidFill>
-                <a:latin typeface="Karla"/>
+                <a:latin typeface="Calibri"/>
               </a:rPr>
               <a:t>The Pastoral Guide</a:t>
             </a:r>
@@ -13402,7 +12582,7 @@
                 <a:solidFill>
                   <a:srgbClr val="AAA49D"/>
                 </a:solidFill>
-                <a:latin typeface="Karla"/>
+                <a:latin typeface="Calibri"/>
               </a:rPr>
               <a:t>5 / 18</a:t>
             </a:r>
@@ -13500,91 +12680,9 @@
                 <a:solidFill>
                   <a:srgbClr val="A3897A"/>
                 </a:solidFill>
-                <a:latin typeface="Karla"/>
+                <a:latin typeface="Calibri"/>
               </a:rPr>
               <a:t>SO WHO IS IN A MOMENT LIKE THAT</a:t>
-            </a:r>
-          </a:p>
-        </p:txBody>
-      </p:sp>
-      <p:sp>
-        <p:nvSpPr>
-          <p:cNvPr id="4" name="Rounded Rectangle 3"/>
-          <p:cNvSpPr/>
-          <p:nvPr/>
-        </p:nvSpPr>
-        <p:spPr>
-          <a:xfrm>
-            <a:off x="7543800" y="530352"/>
-            <a:ext cx="914400" cy="347472"/>
-          </a:xfrm>
-          <a:prstGeom prst="roundRect">
-            <a:avLst>
-              <a:gd name="adj" fmla="val 50000"/>
-            </a:avLst>
-          </a:prstGeom>
-          <a:solidFill>
-            <a:srgbClr val="F0EAE3"/>
-          </a:solidFill>
-          <a:ln>
-            <a:noFill/>
-          </a:ln>
-          <a:effectLst/>
-        </p:spPr>
-        <p:style>
-          <a:lnRef idx="1">
-            <a:schemeClr val="accent1"/>
-          </a:lnRef>
-          <a:fillRef idx="3">
-            <a:schemeClr val="accent1"/>
-          </a:fillRef>
-          <a:effectRef idx="2">
-            <a:schemeClr val="accent1"/>
-          </a:effectRef>
-          <a:fontRef idx="minor">
-            <a:schemeClr val="lt1"/>
-          </a:fontRef>
-        </p:style>
-        <p:txBody>
-          <a:bodyPr rtlCol="0" anchor="ctr"/>
-          <a:lstStyle/>
-          <a:p>
-            <a:pPr algn="ctr"/>
-          </a:p>
-        </p:txBody>
-      </p:sp>
-      <p:sp>
-        <p:nvSpPr>
-          <p:cNvPr id="5" name="TextBox 4"/>
-          <p:cNvSpPr txBox="1"/>
-          <p:nvPr/>
-        </p:nvSpPr>
-        <p:spPr>
-          <a:xfrm>
-            <a:off x="7543800" y="594360"/>
-            <a:ext cx="914400" cy="237744"/>
-          </a:xfrm>
-          <a:prstGeom prst="rect">
-            <a:avLst/>
-          </a:prstGeom>
-          <a:noFill/>
-          <a:effectLst/>
-        </p:spPr>
-        <p:txBody>
-          <a:bodyPr wrap="square" lIns="0" rIns="0" tIns="0" bIns="0" anchor="t">
-            <a:spAutoFit/>
-          </a:bodyPr>
-          <a:lstStyle/>
-          <a:p>
-            <a:pPr algn="ctr"/>
-            <a:r>
-              <a:rPr sz="1000" b="1" spc="100">
-                <a:solidFill>
-                  <a:srgbClr val="6B4F3E"/>
-                </a:solidFill>
-                <a:latin typeface="Karla"/>
-              </a:rPr>
-              <a:t>TEACH</a:t>
             </a:r>
           </a:p>
         </p:txBody>
@@ -13614,11 +12712,11 @@
           <a:p>
             <a:pPr algn="l"/>
             <a:r>
-              <a:rPr sz="3100" b="1">
+              <a:rPr sz="3100" b="0">
                 <a:solidFill>
                   <a:srgbClr val="3A332E"/>
                 </a:solidFill>
-                <a:latin typeface="Libre Caslon Display"/>
+                <a:latin typeface="Georgia"/>
               </a:rPr>
               <a:t>Five roles</a:t>
             </a:r>
@@ -13740,11 +12838,11 @@
           <a:p>
             <a:pPr algn="ctr"/>
             <a:r>
-              <a:rPr sz="1800" b="1">
+              <a:rPr sz="1800" b="0">
                 <a:solidFill>
                   <a:srgbClr val="FFFDF7"/>
                 </a:solidFill>
-                <a:latin typeface="Libre Caslon Display"/>
+                <a:latin typeface="Georgia"/>
               </a:rPr>
               <a:t>1</a:t>
             </a:r>
@@ -13780,11 +12878,11 @@
               </a:lnSpc>
             </a:pPr>
             <a:r>
-              <a:rPr sz="1400" b="1">
+              <a:rPr sz="1400" b="0">
                 <a:solidFill>
                   <a:srgbClr val="6B4F3E"/>
                 </a:solidFill>
-                <a:latin typeface="Libre Caslon Display"/>
+                <a:latin typeface="Georgia"/>
               </a:rPr>
               <a:t>Starts it</a:t>
             </a:r>
@@ -13824,7 +12922,7 @@
                 <a:solidFill>
                   <a:srgbClr val="706962"/>
                 </a:solidFill>
-                <a:latin typeface="Karla"/>
+                <a:latin typeface="Calibri"/>
               </a:rPr>
               <a:t>Says the thing first.</a:t>
             </a:r>
@@ -13946,11 +13044,11 @@
           <a:p>
             <a:pPr algn="ctr"/>
             <a:r>
-              <a:rPr sz="1800" b="1">
+              <a:rPr sz="1800" b="0">
                 <a:solidFill>
                   <a:srgbClr val="FFFDF7"/>
                 </a:solidFill>
-                <a:latin typeface="Libre Caslon Display"/>
+                <a:latin typeface="Georgia"/>
               </a:rPr>
               <a:t>2</a:t>
             </a:r>
@@ -13986,11 +13084,11 @@
               </a:lnSpc>
             </a:pPr>
             <a:r>
-              <a:rPr sz="1400" b="1">
+              <a:rPr sz="1400" b="0">
                 <a:solidFill>
                   <a:srgbClr val="6B4F3E"/>
                 </a:solidFill>
-                <a:latin typeface="Libre Caslon Display"/>
+                <a:latin typeface="Georgia"/>
               </a:rPr>
               <a:t>Joins in</a:t>
             </a:r>
@@ -14030,7 +13128,7 @@
                 <a:solidFill>
                   <a:srgbClr val="706962"/>
                 </a:solidFill>
-                <a:latin typeface="Karla"/>
+                <a:latin typeface="Calibri"/>
               </a:rPr>
               <a:t>Repeats it somewhere else.</a:t>
             </a:r>
@@ -14152,11 +13250,11 @@
           <a:p>
             <a:pPr algn="ctr"/>
             <a:r>
-              <a:rPr sz="1800" b="1">
+              <a:rPr sz="1800" b="0">
                 <a:solidFill>
                   <a:srgbClr val="FFFDF7"/>
                 </a:solidFill>
-                <a:latin typeface="Libre Caslon Display"/>
+                <a:latin typeface="Georgia"/>
               </a:rPr>
               <a:t>3</a:t>
             </a:r>
@@ -14192,11 +13290,11 @@
               </a:lnSpc>
             </a:pPr>
             <a:r>
-              <a:rPr sz="1400" b="1">
+              <a:rPr sz="1400" b="0">
                 <a:solidFill>
                   <a:srgbClr val="6B4F3E"/>
                 </a:solidFill>
-                <a:latin typeface="Libre Caslon Display"/>
+                <a:latin typeface="Georgia"/>
               </a:rPr>
               <a:t>Laughs</a:t>
             </a:r>
@@ -14236,7 +13334,7 @@
                 <a:solidFill>
                   <a:srgbClr val="706962"/>
                 </a:solidFill>
-                <a:latin typeface="Karla"/>
+                <a:latin typeface="Calibri"/>
               </a:rPr>
               <a:t>Gives it an audience.</a:t>
             </a:r>
@@ -14358,11 +13456,11 @@
           <a:p>
             <a:pPr algn="ctr"/>
             <a:r>
-              <a:rPr sz="1800" b="1">
+              <a:rPr sz="1800" b="0">
                 <a:solidFill>
                   <a:srgbClr val="FFFDF7"/>
                 </a:solidFill>
-                <a:latin typeface="Libre Caslon Display"/>
+                <a:latin typeface="Georgia"/>
               </a:rPr>
               <a:t>4</a:t>
             </a:r>
@@ -14398,11 +13496,11 @@
               </a:lnSpc>
             </a:pPr>
             <a:r>
-              <a:rPr sz="1400" b="1">
+              <a:rPr sz="1400" b="0">
                 <a:solidFill>
                   <a:srgbClr val="6B4F3E"/>
                 </a:solidFill>
-                <a:latin typeface="Libre Caslon Display"/>
+                <a:latin typeface="Georgia"/>
               </a:rPr>
               <a:t>Looks away</a:t>
             </a:r>
@@ -14442,7 +13540,7 @@
                 <a:solidFill>
                   <a:srgbClr val="706962"/>
                 </a:solidFill>
-                <a:latin typeface="Karla"/>
+                <a:latin typeface="Calibri"/>
               </a:rPr>
               <a:t>Waits for it to pass.</a:t>
             </a:r>
@@ -14564,11 +13662,11 @@
           <a:p>
             <a:pPr algn="ctr"/>
             <a:r>
-              <a:rPr sz="1800" b="1">
+              <a:rPr sz="1800" b="0">
                 <a:solidFill>
                   <a:srgbClr val="FFFDF7"/>
                 </a:solidFill>
-                <a:latin typeface="Libre Caslon Display"/>
+                <a:latin typeface="Georgia"/>
               </a:rPr>
               <a:t>5</a:t>
             </a:r>
@@ -14604,11 +13702,11 @@
               </a:lnSpc>
             </a:pPr>
             <a:r>
-              <a:rPr sz="1400" b="1">
+              <a:rPr sz="1400" b="0">
                 <a:solidFill>
                   <a:srgbClr val="6B4F3E"/>
                 </a:solidFill>
-                <a:latin typeface="Libre Caslon Display"/>
+                <a:latin typeface="Georgia"/>
               </a:rPr>
               <a:t>Steps in</a:t>
             </a:r>
@@ -14648,7 +13746,7 @@
                 <a:solidFill>
                   <a:srgbClr val="706962"/>
                 </a:solidFill>
-                <a:latin typeface="Karla"/>
+                <a:latin typeface="Calibri"/>
               </a:rPr>
               <a:t>Changes what happens next.</a:t>
             </a:r>
@@ -14688,7 +13786,7 @@
                 <a:solidFill>
                   <a:srgbClr val="706962"/>
                 </a:solidFill>
-                <a:latin typeface="Karla"/>
+                <a:latin typeface="Calibri"/>
               </a:rPr>
               <a:t>The biggest groups are the third and fourth ones. The roles are not fixed, and most people are a different one on a different day.</a:t>
             </a:r>
@@ -14748,7 +13846,7 @@
                 <a:solidFill>
                   <a:srgbClr val="AAA49D"/>
                 </a:solidFill>
-                <a:latin typeface="Karla"/>
+                <a:latin typeface="Calibri"/>
               </a:rPr>
               <a:t>The Pastoral Guide</a:t>
             </a:r>
@@ -14784,7 +13882,7 @@
                 <a:solidFill>
                   <a:srgbClr val="AAA49D"/>
                 </a:solidFill>
-                <a:latin typeface="Karla"/>
+                <a:latin typeface="Calibri"/>
               </a:rPr>
               <a:t>6 / 18</a:t>
             </a:r>
@@ -14882,91 +13980,9 @@
                 <a:solidFill>
                   <a:srgbClr val="A3897A"/>
                 </a:solidFill>
-                <a:latin typeface="Karla"/>
+                <a:latin typeface="Calibri"/>
               </a:rPr>
               <a:t>WHERE THE FIVE COME FROM</a:t>
-            </a:r>
-          </a:p>
-        </p:txBody>
-      </p:sp>
-      <p:sp>
-        <p:nvSpPr>
-          <p:cNvPr id="4" name="Rounded Rectangle 3"/>
-          <p:cNvSpPr/>
-          <p:nvPr/>
-        </p:nvSpPr>
-        <p:spPr>
-          <a:xfrm>
-            <a:off x="7543800" y="530352"/>
-            <a:ext cx="914400" cy="347472"/>
-          </a:xfrm>
-          <a:prstGeom prst="roundRect">
-            <a:avLst>
-              <a:gd name="adj" fmla="val 50000"/>
-            </a:avLst>
-          </a:prstGeom>
-          <a:solidFill>
-            <a:srgbClr val="F0EAE3"/>
-          </a:solidFill>
-          <a:ln>
-            <a:noFill/>
-          </a:ln>
-          <a:effectLst/>
-        </p:spPr>
-        <p:style>
-          <a:lnRef idx="1">
-            <a:schemeClr val="accent1"/>
-          </a:lnRef>
-          <a:fillRef idx="3">
-            <a:schemeClr val="accent1"/>
-          </a:fillRef>
-          <a:effectRef idx="2">
-            <a:schemeClr val="accent1"/>
-          </a:effectRef>
-          <a:fontRef idx="minor">
-            <a:schemeClr val="lt1"/>
-          </a:fontRef>
-        </p:style>
-        <p:txBody>
-          <a:bodyPr rtlCol="0" anchor="ctr"/>
-          <a:lstStyle/>
-          <a:p>
-            <a:pPr algn="ctr"/>
-          </a:p>
-        </p:txBody>
-      </p:sp>
-      <p:sp>
-        <p:nvSpPr>
-          <p:cNvPr id="5" name="TextBox 4"/>
-          <p:cNvSpPr txBox="1"/>
-          <p:nvPr/>
-        </p:nvSpPr>
-        <p:spPr>
-          <a:xfrm>
-            <a:off x="7543800" y="594360"/>
-            <a:ext cx="914400" cy="237744"/>
-          </a:xfrm>
-          <a:prstGeom prst="rect">
-            <a:avLst/>
-          </a:prstGeom>
-          <a:noFill/>
-          <a:effectLst/>
-        </p:spPr>
-        <p:txBody>
-          <a:bodyPr wrap="square" lIns="0" rIns="0" tIns="0" bIns="0" anchor="t">
-            <a:spAutoFit/>
-          </a:bodyPr>
-          <a:lstStyle/>
-          <a:p>
-            <a:pPr algn="ctr"/>
-            <a:r>
-              <a:rPr sz="1000" b="1" spc="100">
-                <a:solidFill>
-                  <a:srgbClr val="6B4F3E"/>
-                </a:solidFill>
-                <a:latin typeface="Karla"/>
-              </a:rPr>
-              <a:t>TEACH</a:t>
             </a:r>
           </a:p>
         </p:txBody>
@@ -14996,11 +14012,11 @@
           <a:p>
             <a:pPr algn="l"/>
             <a:r>
-              <a:rPr sz="3100" b="1">
+              <a:rPr sz="3100" b="0">
                 <a:solidFill>
                   <a:srgbClr val="3A332E"/>
                 </a:solidFill>
-                <a:latin typeface="Libre Caslon Display"/>
+                <a:latin typeface="Georgia"/>
               </a:rPr>
               <a:t>Somebody counted this</a:t>
             </a:r>
@@ -15078,11 +14094,11 @@
           <a:p>
             <a:pPr algn="l"/>
             <a:r>
-              <a:rPr sz="2000" b="1">
+              <a:rPr sz="2000" b="0">
                 <a:solidFill>
                   <a:srgbClr val="6B4F3E"/>
                 </a:solidFill>
-                <a:latin typeface="Libre Caslon Display"/>
+                <a:latin typeface="Georgia"/>
               </a:rPr>
               <a:t>573 students in Finland, 1996.</a:t>
             </a:r>
@@ -15122,7 +14138,7 @@
                 <a:solidFill>
                   <a:srgbClr val="706962"/>
                 </a:solidFill>
-                <a:latin typeface="Karla"/>
+                <a:latin typeface="Calibri"/>
               </a:rPr>
               <a:t>Researchers asked a whole year group who did what when somebody was picked on. Almost everybody held a role. The biggest group was not the one who started it. It was the people who laughed along, or who were simply there and said nothing.</a:t>
             </a:r>
@@ -15162,7 +14178,7 @@
                 <a:solidFill>
                   <a:srgbClr val="706962"/>
                 </a:solidFill>
-                <a:latin typeface="Karla"/>
+                <a:latin typeface="Calibri"/>
               </a:rPr>
               <a:t>That study is thirty years old and from another country. The roles have held up since.</a:t>
             </a:r>
@@ -15222,7 +14238,7 @@
                 <a:solidFill>
                   <a:srgbClr val="AAA49D"/>
                 </a:solidFill>
-                <a:latin typeface="Karla"/>
+                <a:latin typeface="Calibri"/>
               </a:rPr>
               <a:t>The Pastoral Guide</a:t>
             </a:r>
@@ -15258,7 +14274,7 @@
                 <a:solidFill>
                   <a:srgbClr val="AAA49D"/>
                 </a:solidFill>
-                <a:latin typeface="Karla"/>
+                <a:latin typeface="Calibri"/>
               </a:rPr>
               <a:t>7 / 18</a:t>
             </a:r>
@@ -15356,7 +14372,7 @@
                 <a:solidFill>
                   <a:srgbClr val="A3897A"/>
                 </a:solidFill>
-                <a:latin typeface="Karla"/>
+                <a:latin typeface="Calibri"/>
               </a:rPr>
               <a:t>BEFORE THE ANSWER</a:t>
             </a:r>
@@ -15365,18 +14381,140 @@
       </p:sp>
       <p:sp>
         <p:nvSpPr>
-          <p:cNvPr id="4" name="Rounded Rectangle 3"/>
+          <p:cNvPr id="6" name="TextBox 5"/>
+          <p:cNvSpPr txBox="1"/>
+          <p:nvPr/>
+        </p:nvSpPr>
+        <p:spPr>
+          <a:xfrm>
+            <a:off x="685800" y="841248"/>
+            <a:ext cx="6309360" cy="566928"/>
+          </a:xfrm>
+          <a:prstGeom prst="rect">
+            <a:avLst/>
+          </a:prstGeom>
+          <a:noFill/>
+          <a:effectLst/>
+        </p:spPr>
+        <p:txBody>
+          <a:bodyPr wrap="square" lIns="0" rIns="0" tIns="0" bIns="0" anchor="t">
+            <a:spAutoFit/>
+          </a:bodyPr>
+          <a:lstStyle/>
+          <a:p>
+            <a:pPr algn="l"/>
+            <a:r>
+              <a:rPr sz="3100" b="0">
+                <a:solidFill>
+                  <a:srgbClr val="3A332E"/>
+                </a:solidFill>
+                <a:latin typeface="Georgia"/>
+              </a:rPr>
+              <a:t>What did they find?</a:t>
+            </a:r>
+          </a:p>
+        </p:txBody>
+      </p:sp>
+      <p:sp>
+        <p:nvSpPr>
+          <p:cNvPr id="7" name="Rounded Rectangle 6"/>
           <p:cNvSpPr/>
           <p:nvPr/>
         </p:nvSpPr>
         <p:spPr>
           <a:xfrm>
-            <a:off x="7543800" y="530352"/>
-            <a:ext cx="914400" cy="347472"/>
+            <a:off x="685800" y="1481328"/>
+            <a:ext cx="7772400" cy="1060704"/>
           </a:xfrm>
           <a:prstGeom prst="roundRect">
             <a:avLst>
-              <a:gd name="adj" fmla="val 50000"/>
+              <a:gd name="adj" fmla="val 7758"/>
+            </a:avLst>
+          </a:prstGeom>
+          <a:solidFill>
+            <a:srgbClr val="FFFDF7"/>
+          </a:solidFill>
+          <a:ln>
+            <a:noFill/>
+          </a:ln>
+          <a:effectLst/>
+        </p:spPr>
+        <p:style>
+          <a:lnRef idx="1">
+            <a:schemeClr val="accent1"/>
+          </a:lnRef>
+          <a:fillRef idx="3">
+            <a:schemeClr val="accent1"/>
+          </a:fillRef>
+          <a:effectRef idx="2">
+            <a:schemeClr val="accent1"/>
+          </a:effectRef>
+          <a:fontRef idx="minor">
+            <a:schemeClr val="lt1"/>
+          </a:fontRef>
+        </p:style>
+        <p:txBody>
+          <a:bodyPr rtlCol="0" anchor="ctr"/>
+          <a:lstStyle/>
+          <a:p>
+            <a:pPr algn="ctr"/>
+          </a:p>
+        </p:txBody>
+      </p:sp>
+      <p:sp>
+        <p:nvSpPr>
+          <p:cNvPr id="8" name="TextBox 7"/>
+          <p:cNvSpPr txBox="1"/>
+          <p:nvPr/>
+        </p:nvSpPr>
+        <p:spPr>
+          <a:xfrm>
+            <a:off x="1051560" y="1664208"/>
+            <a:ext cx="7040880" cy="786384"/>
+          </a:xfrm>
+          <a:prstGeom prst="rect">
+            <a:avLst/>
+          </a:prstGeom>
+          <a:noFill/>
+          <a:effectLst/>
+        </p:spPr>
+        <p:txBody>
+          <a:bodyPr wrap="square" lIns="0" rIns="0" tIns="0" bIns="0" anchor="t">
+            <a:spAutoFit/>
+          </a:bodyPr>
+          <a:lstStyle/>
+          <a:p>
+            <a:pPr algn="l">
+              <a:lnSpc>
+                <a:spcPct val="135000"/>
+              </a:lnSpc>
+            </a:pPr>
+            <a:r>
+              <a:rPr sz="1300" b="0">
+                <a:solidFill>
+                  <a:srgbClr val="706962"/>
+                </a:solidFill>
+                <a:latin typeface="Calibri"/>
+              </a:rPr>
+              <a:t>Two schools in Toronto. Cameras and microphones on the playground for 125 hours. Researchers recorded 306 moments of somebody being picked on, and watched what other children did.</a:t>
+            </a:r>
+          </a:p>
+        </p:txBody>
+      </p:sp>
+      <p:sp>
+        <p:nvSpPr>
+          <p:cNvPr id="9" name="Rounded Rectangle 8"/>
+          <p:cNvSpPr/>
+          <p:nvPr/>
+        </p:nvSpPr>
+        <p:spPr>
+          <a:xfrm>
+            <a:off x="685800" y="2706624"/>
+            <a:ext cx="7772400" cy="640080"/>
+          </a:xfrm>
+          <a:prstGeom prst="roundRect">
+            <a:avLst>
+              <a:gd name="adj" fmla="val 12857"/>
             </a:avLst>
           </a:prstGeom>
           <a:solidFill>
@@ -15411,94 +14549,20 @@
       </p:sp>
       <p:sp>
         <p:nvSpPr>
-          <p:cNvPr id="5" name="TextBox 4"/>
-          <p:cNvSpPr txBox="1"/>
-          <p:nvPr/>
-        </p:nvSpPr>
-        <p:spPr>
-          <a:xfrm>
-            <a:off x="7543800" y="594360"/>
-            <a:ext cx="914400" cy="237744"/>
-          </a:xfrm>
-          <a:prstGeom prst="rect">
-            <a:avLst/>
-          </a:prstGeom>
-          <a:noFill/>
-          <a:effectLst/>
-        </p:spPr>
-        <p:txBody>
-          <a:bodyPr wrap="square" lIns="0" rIns="0" tIns="0" bIns="0" anchor="t">
-            <a:spAutoFit/>
-          </a:bodyPr>
-          <a:lstStyle/>
-          <a:p>
-            <a:pPr algn="ctr"/>
-            <a:r>
-              <a:rPr sz="1000" b="1" spc="100">
-                <a:solidFill>
-                  <a:srgbClr val="6B4F3E"/>
-                </a:solidFill>
-                <a:latin typeface="Karla"/>
-              </a:rPr>
-              <a:t>PREDICT</a:t>
-            </a:r>
-          </a:p>
-        </p:txBody>
-      </p:sp>
-      <p:sp>
-        <p:nvSpPr>
-          <p:cNvPr id="6" name="TextBox 5"/>
-          <p:cNvSpPr txBox="1"/>
-          <p:nvPr/>
-        </p:nvSpPr>
-        <p:spPr>
-          <a:xfrm>
-            <a:off x="685800" y="841248"/>
-            <a:ext cx="6309360" cy="566928"/>
-          </a:xfrm>
-          <a:prstGeom prst="rect">
-            <a:avLst/>
-          </a:prstGeom>
-          <a:noFill/>
-          <a:effectLst/>
-        </p:spPr>
-        <p:txBody>
-          <a:bodyPr wrap="square" lIns="0" rIns="0" tIns="0" bIns="0" anchor="t">
-            <a:spAutoFit/>
-          </a:bodyPr>
-          <a:lstStyle/>
-          <a:p>
-            <a:pPr algn="l"/>
-            <a:r>
-              <a:rPr sz="3100" b="1">
-                <a:solidFill>
-                  <a:srgbClr val="3A332E"/>
-                </a:solidFill>
-                <a:latin typeface="Libre Caslon Display"/>
-              </a:rPr>
-              <a:t>What did they find?</a:t>
-            </a:r>
-          </a:p>
-        </p:txBody>
-      </p:sp>
-      <p:sp>
-        <p:nvSpPr>
-          <p:cNvPr id="7" name="Rounded Rectangle 6"/>
+          <p:cNvPr id="10" name="Oval 9"/>
           <p:cNvSpPr/>
           <p:nvPr/>
         </p:nvSpPr>
         <p:spPr>
           <a:xfrm>
-            <a:off x="685800" y="1481328"/>
-            <a:ext cx="7772400" cy="1060704"/>
-          </a:xfrm>
-          <a:prstGeom prst="roundRect">
-            <a:avLst>
-              <a:gd name="adj" fmla="val 7758"/>
-            </a:avLst>
+            <a:off x="941832" y="2825496"/>
+            <a:ext cx="402336" cy="402336"/>
+          </a:xfrm>
+          <a:prstGeom prst="ellipse">
+            <a:avLst/>
           </a:prstGeom>
           <a:solidFill>
-            <a:srgbClr val="FFFDF7"/>
+            <a:srgbClr val="6B4F3E"/>
           </a:solidFill>
           <a:ln>
             <a:noFill/>
@@ -15529,53 +14593,89 @@
       </p:sp>
       <p:sp>
         <p:nvSpPr>
-          <p:cNvPr id="8" name="TextBox 7"/>
-          <p:cNvSpPr txBox="1"/>
-          <p:nvPr/>
-        </p:nvSpPr>
-        <p:spPr>
-          <a:xfrm>
-            <a:off x="1051560" y="1664208"/>
-            <a:ext cx="7040880" cy="786384"/>
-          </a:xfrm>
-          <a:prstGeom prst="rect">
-            <a:avLst/>
-          </a:prstGeom>
-          <a:noFill/>
-          <a:effectLst/>
-        </p:spPr>
-        <p:txBody>
-          <a:bodyPr wrap="square" lIns="0" rIns="0" tIns="0" bIns="0" anchor="t">
+          <p:cNvPr id="11" name="TextBox 10"/>
+          <p:cNvSpPr txBox="1"/>
+          <p:nvPr/>
+        </p:nvSpPr>
+        <p:spPr>
+          <a:xfrm>
+            <a:off x="941832" y="2926080"/>
+            <a:ext cx="402336" cy="402336"/>
+          </a:xfrm>
+          <a:prstGeom prst="rect">
+            <a:avLst/>
+          </a:prstGeom>
+          <a:noFill/>
+          <a:effectLst/>
+        </p:spPr>
+        <p:txBody>
+          <a:bodyPr wrap="square" lIns="0" rIns="0" tIns="0" bIns="0" anchor="t">
+            <a:spAutoFit/>
+          </a:bodyPr>
+          <a:lstStyle/>
+          <a:p>
+            <a:pPr algn="ctr"/>
+            <a:r>
+              <a:rPr sz="1400" b="0">
+                <a:solidFill>
+                  <a:srgbClr val="FFFDF7"/>
+                </a:solidFill>
+                <a:latin typeface="Georgia"/>
+              </a:rPr>
+              <a:t>1</a:t>
+            </a:r>
+          </a:p>
+        </p:txBody>
+      </p:sp>
+      <p:sp>
+        <p:nvSpPr>
+          <p:cNvPr id="12" name="TextBox 11"/>
+          <p:cNvSpPr txBox="1"/>
+          <p:nvPr/>
+        </p:nvSpPr>
+        <p:spPr>
+          <a:xfrm>
+            <a:off x="1572768" y="2852928"/>
+            <a:ext cx="6583680" cy="457200"/>
+          </a:xfrm>
+          <a:prstGeom prst="rect">
+            <a:avLst/>
+          </a:prstGeom>
+          <a:noFill/>
+          <a:effectLst/>
+        </p:spPr>
+        <p:txBody>
+          <a:bodyPr wrap="square" lIns="0" rIns="0" tIns="0" bIns="0" anchor="ctr">
             <a:spAutoFit/>
           </a:bodyPr>
           <a:lstStyle/>
           <a:p>
             <a:pPr algn="l">
               <a:lnSpc>
-                <a:spcPct val="135000"/>
+                <a:spcPct val="110000"/>
               </a:lnSpc>
             </a:pPr>
             <a:r>
-              <a:rPr sz="1300" b="0">
-                <a:solidFill>
-                  <a:srgbClr val="706962"/>
-                </a:solidFill>
-                <a:latin typeface="Karla"/>
-              </a:rPr>
-              <a:t>Two schools in Toronto. Cameras and microphones on the playground for 125 hours. Researchers recorded 306 moments of somebody being picked on, and watched what other children did.</a:t>
-            </a:r>
-          </a:p>
-        </p:txBody>
-      </p:sp>
-      <p:sp>
-        <p:nvSpPr>
-          <p:cNvPr id="9" name="Rounded Rectangle 8"/>
+              <a:rPr sz="1400" b="0">
+                <a:solidFill>
+                  <a:srgbClr val="6B4F3E"/>
+                </a:solidFill>
+                <a:latin typeface="Georgia"/>
+              </a:rPr>
+              <a:t>In how many of those 306 moments did another child step in?</a:t>
+            </a:r>
+          </a:p>
+        </p:txBody>
+      </p:sp>
+      <p:sp>
+        <p:nvSpPr>
+          <p:cNvPr id="13" name="Rounded Rectangle 12"/>
           <p:cNvSpPr/>
           <p:nvPr/>
         </p:nvSpPr>
         <p:spPr>
           <a:xfrm>
-            <a:off x="685800" y="2706624"/>
+            <a:off x="685800" y="3456432"/>
             <a:ext cx="7772400" cy="640080"/>
           </a:xfrm>
           <a:prstGeom prst="roundRect">
@@ -15615,13 +14715,13 @@
       </p:sp>
       <p:sp>
         <p:nvSpPr>
-          <p:cNvPr id="10" name="Oval 9"/>
+          <p:cNvPr id="14" name="Oval 13"/>
           <p:cNvSpPr/>
           <p:nvPr/>
         </p:nvSpPr>
         <p:spPr>
           <a:xfrm>
-            <a:off x="941832" y="2825496"/>
+            <a:off x="941832" y="3575303"/>
             <a:ext cx="402336" cy="402336"/>
           </a:xfrm>
           <a:prstGeom prst="ellipse">
@@ -15659,13 +14759,13 @@
       </p:sp>
       <p:sp>
         <p:nvSpPr>
-          <p:cNvPr id="11" name="TextBox 10"/>
-          <p:cNvSpPr txBox="1"/>
-          <p:nvPr/>
-        </p:nvSpPr>
-        <p:spPr>
-          <a:xfrm>
-            <a:off x="941832" y="2926080"/>
+          <p:cNvPr id="15" name="TextBox 14"/>
+          <p:cNvSpPr txBox="1"/>
+          <p:nvPr/>
+        </p:nvSpPr>
+        <p:spPr>
+          <a:xfrm>
+            <a:off x="941832" y="3675887"/>
             <a:ext cx="402336" cy="402336"/>
           </a:xfrm>
           <a:prstGeom prst="rect">
@@ -15682,26 +14782,26 @@
           <a:p>
             <a:pPr algn="ctr"/>
             <a:r>
-              <a:rPr sz="1400" b="1">
+              <a:rPr sz="1400" b="0">
                 <a:solidFill>
                   <a:srgbClr val="FFFDF7"/>
                 </a:solidFill>
-                <a:latin typeface="Libre Caslon Display"/>
-              </a:rPr>
-              <a:t>1</a:t>
-            </a:r>
-          </a:p>
-        </p:txBody>
-      </p:sp>
-      <p:sp>
-        <p:nvSpPr>
-          <p:cNvPr id="12" name="TextBox 11"/>
-          <p:cNvSpPr txBox="1"/>
-          <p:nvPr/>
-        </p:nvSpPr>
-        <p:spPr>
-          <a:xfrm>
-            <a:off x="1572768" y="2852928"/>
+                <a:latin typeface="Georgia"/>
+              </a:rPr>
+              <a:t>2</a:t>
+            </a:r>
+          </a:p>
+        </p:txBody>
+      </p:sp>
+      <p:sp>
+        <p:nvSpPr>
+          <p:cNvPr id="16" name="TextBox 15"/>
+          <p:cNvSpPr txBox="1"/>
+          <p:nvPr/>
+        </p:nvSpPr>
+        <p:spPr>
+          <a:xfrm>
+            <a:off x="1572768" y="3602736"/>
             <a:ext cx="6583680" cy="457200"/>
           </a:xfrm>
           <a:prstGeom prst="rect">
@@ -15722,177 +14822,11 @@
               </a:lnSpc>
             </a:pPr>
             <a:r>
-              <a:rPr sz="1400" b="1">
+              <a:rPr sz="1400" b="0">
                 <a:solidFill>
                   <a:srgbClr val="6B4F3E"/>
                 </a:solidFill>
-                <a:latin typeface="Libre Caslon Display"/>
-              </a:rPr>
-              <a:t>In how many of those 306 moments did another child step in?</a:t>
-            </a:r>
-          </a:p>
-        </p:txBody>
-      </p:sp>
-      <p:sp>
-        <p:nvSpPr>
-          <p:cNvPr id="13" name="Rounded Rectangle 12"/>
-          <p:cNvSpPr/>
-          <p:nvPr/>
-        </p:nvSpPr>
-        <p:spPr>
-          <a:xfrm>
-            <a:off x="685800" y="3456432"/>
-            <a:ext cx="7772400" cy="640080"/>
-          </a:xfrm>
-          <a:prstGeom prst="roundRect">
-            <a:avLst>
-              <a:gd name="adj" fmla="val 12857"/>
-            </a:avLst>
-          </a:prstGeom>
-          <a:solidFill>
-            <a:srgbClr val="F0EAE3"/>
-          </a:solidFill>
-          <a:ln>
-            <a:noFill/>
-          </a:ln>
-          <a:effectLst/>
-        </p:spPr>
-        <p:style>
-          <a:lnRef idx="1">
-            <a:schemeClr val="accent1"/>
-          </a:lnRef>
-          <a:fillRef idx="3">
-            <a:schemeClr val="accent1"/>
-          </a:fillRef>
-          <a:effectRef idx="2">
-            <a:schemeClr val="accent1"/>
-          </a:effectRef>
-          <a:fontRef idx="minor">
-            <a:schemeClr val="lt1"/>
-          </a:fontRef>
-        </p:style>
-        <p:txBody>
-          <a:bodyPr rtlCol="0" anchor="ctr"/>
-          <a:lstStyle/>
-          <a:p>
-            <a:pPr algn="ctr"/>
-          </a:p>
-        </p:txBody>
-      </p:sp>
-      <p:sp>
-        <p:nvSpPr>
-          <p:cNvPr id="14" name="Oval 13"/>
-          <p:cNvSpPr/>
-          <p:nvPr/>
-        </p:nvSpPr>
-        <p:spPr>
-          <a:xfrm>
-            <a:off x="941832" y="3575303"/>
-            <a:ext cx="402336" cy="402336"/>
-          </a:xfrm>
-          <a:prstGeom prst="ellipse">
-            <a:avLst/>
-          </a:prstGeom>
-          <a:solidFill>
-            <a:srgbClr val="6B4F3E"/>
-          </a:solidFill>
-          <a:ln>
-            <a:noFill/>
-          </a:ln>
-          <a:effectLst/>
-        </p:spPr>
-        <p:style>
-          <a:lnRef idx="1">
-            <a:schemeClr val="accent1"/>
-          </a:lnRef>
-          <a:fillRef idx="3">
-            <a:schemeClr val="accent1"/>
-          </a:fillRef>
-          <a:effectRef idx="2">
-            <a:schemeClr val="accent1"/>
-          </a:effectRef>
-          <a:fontRef idx="minor">
-            <a:schemeClr val="lt1"/>
-          </a:fontRef>
-        </p:style>
-        <p:txBody>
-          <a:bodyPr rtlCol="0" anchor="ctr"/>
-          <a:lstStyle/>
-          <a:p>
-            <a:pPr algn="ctr"/>
-          </a:p>
-        </p:txBody>
-      </p:sp>
-      <p:sp>
-        <p:nvSpPr>
-          <p:cNvPr id="15" name="TextBox 14"/>
-          <p:cNvSpPr txBox="1"/>
-          <p:nvPr/>
-        </p:nvSpPr>
-        <p:spPr>
-          <a:xfrm>
-            <a:off x="941832" y="3675887"/>
-            <a:ext cx="402336" cy="402336"/>
-          </a:xfrm>
-          <a:prstGeom prst="rect">
-            <a:avLst/>
-          </a:prstGeom>
-          <a:noFill/>
-          <a:effectLst/>
-        </p:spPr>
-        <p:txBody>
-          <a:bodyPr wrap="square" lIns="0" rIns="0" tIns="0" bIns="0" anchor="t">
-            <a:spAutoFit/>
-          </a:bodyPr>
-          <a:lstStyle/>
-          <a:p>
-            <a:pPr algn="ctr"/>
-            <a:r>
-              <a:rPr sz="1400" b="1">
-                <a:solidFill>
-                  <a:srgbClr val="FFFDF7"/>
-                </a:solidFill>
-                <a:latin typeface="Libre Caslon Display"/>
-              </a:rPr>
-              <a:t>2</a:t>
-            </a:r>
-          </a:p>
-        </p:txBody>
-      </p:sp>
-      <p:sp>
-        <p:nvSpPr>
-          <p:cNvPr id="16" name="TextBox 15"/>
-          <p:cNvSpPr txBox="1"/>
-          <p:nvPr/>
-        </p:nvSpPr>
-        <p:spPr>
-          <a:xfrm>
-            <a:off x="1572768" y="3602736"/>
-            <a:ext cx="6583680" cy="457200"/>
-          </a:xfrm>
-          <a:prstGeom prst="rect">
-            <a:avLst/>
-          </a:prstGeom>
-          <a:noFill/>
-          <a:effectLst/>
-        </p:spPr>
-        <p:txBody>
-          <a:bodyPr wrap="square" lIns="0" rIns="0" tIns="0" bIns="0" anchor="ctr">
-            <a:spAutoFit/>
-          </a:bodyPr>
-          <a:lstStyle/>
-          <a:p>
-            <a:pPr algn="l">
-              <a:lnSpc>
-                <a:spcPct val="110000"/>
-              </a:lnSpc>
-            </a:pPr>
-            <a:r>
-              <a:rPr sz="1400" b="1">
-                <a:solidFill>
-                  <a:srgbClr val="6B4F3E"/>
-                </a:solidFill>
-                <a:latin typeface="Libre Caslon Display"/>
+                <a:latin typeface="Georgia"/>
               </a:rPr>
               <a:t>When one did step in, how often did it stop within ten seconds?</a:t>
             </a:r>
@@ -15932,7 +14866,7 @@
                 <a:solidFill>
                   <a:srgbClr val="6B4F3E"/>
                 </a:solidFill>
-                <a:latin typeface="Karla"/>
+                <a:latin typeface="Calibri"/>
               </a:rPr>
               <a:t>In pairs, two minutes. Write a percentage for each.</a:t>
             </a:r>
@@ -15992,7 +14926,7 @@
                 <a:solidFill>
                   <a:srgbClr val="AAA49D"/>
                 </a:solidFill>
-                <a:latin typeface="Karla"/>
+                <a:latin typeface="Calibri"/>
               </a:rPr>
               <a:t>The Pastoral Guide</a:t>
             </a:r>
@@ -16028,7 +14962,7 @@
                 <a:solidFill>
                   <a:srgbClr val="AAA49D"/>
                 </a:solidFill>
-                <a:latin typeface="Karla"/>
+                <a:latin typeface="Calibri"/>
               </a:rPr>
               <a:t>8 / 18</a:t>
             </a:r>
@@ -16126,91 +15060,9 @@
                 <a:solidFill>
                   <a:srgbClr val="A3897A"/>
                 </a:solidFill>
-                <a:latin typeface="Karla"/>
+                <a:latin typeface="Calibri"/>
               </a:rPr>
               <a:t>THE ANSWER</a:t>
-            </a:r>
-          </a:p>
-        </p:txBody>
-      </p:sp>
-      <p:sp>
-        <p:nvSpPr>
-          <p:cNvPr id="4" name="Rounded Rectangle 3"/>
-          <p:cNvSpPr/>
-          <p:nvPr/>
-        </p:nvSpPr>
-        <p:spPr>
-          <a:xfrm>
-            <a:off x="7543800" y="530352"/>
-            <a:ext cx="914400" cy="347472"/>
-          </a:xfrm>
-          <a:prstGeom prst="roundRect">
-            <a:avLst>
-              <a:gd name="adj" fmla="val 50000"/>
-            </a:avLst>
-          </a:prstGeom>
-          <a:solidFill>
-            <a:srgbClr val="F0EAE3"/>
-          </a:solidFill>
-          <a:ln>
-            <a:noFill/>
-          </a:ln>
-          <a:effectLst/>
-        </p:spPr>
-        <p:style>
-          <a:lnRef idx="1">
-            <a:schemeClr val="accent1"/>
-          </a:lnRef>
-          <a:fillRef idx="3">
-            <a:schemeClr val="accent1"/>
-          </a:fillRef>
-          <a:effectRef idx="2">
-            <a:schemeClr val="accent1"/>
-          </a:effectRef>
-          <a:fontRef idx="minor">
-            <a:schemeClr val="lt1"/>
-          </a:fontRef>
-        </p:style>
-        <p:txBody>
-          <a:bodyPr rtlCol="0" anchor="ctr"/>
-          <a:lstStyle/>
-          <a:p>
-            <a:pPr algn="ctr"/>
-          </a:p>
-        </p:txBody>
-      </p:sp>
-      <p:sp>
-        <p:nvSpPr>
-          <p:cNvPr id="5" name="TextBox 4"/>
-          <p:cNvSpPr txBox="1"/>
-          <p:nvPr/>
-        </p:nvSpPr>
-        <p:spPr>
-          <a:xfrm>
-            <a:off x="7543800" y="594360"/>
-            <a:ext cx="914400" cy="237744"/>
-          </a:xfrm>
-          <a:prstGeom prst="rect">
-            <a:avLst/>
-          </a:prstGeom>
-          <a:noFill/>
-          <a:effectLst/>
-        </p:spPr>
-        <p:txBody>
-          <a:bodyPr wrap="square" lIns="0" rIns="0" tIns="0" bIns="0" anchor="t">
-            <a:spAutoFit/>
-          </a:bodyPr>
-          <a:lstStyle/>
-          <a:p>
-            <a:pPr algn="ctr"/>
-            <a:r>
-              <a:rPr sz="1000" b="1" spc="100">
-                <a:solidFill>
-                  <a:srgbClr val="6B4F3E"/>
-                </a:solidFill>
-                <a:latin typeface="Karla"/>
-              </a:rPr>
-              <a:t>REVEAL</a:t>
             </a:r>
           </a:p>
         </p:txBody>
@@ -16240,11 +15092,11 @@
           <a:p>
             <a:pPr algn="l"/>
             <a:r>
-              <a:rPr sz="3100" b="1">
+              <a:rPr sz="3100" b="0">
                 <a:solidFill>
                   <a:srgbClr val="3A332E"/>
                 </a:solidFill>
-                <a:latin typeface="Libre Caslon Display"/>
+                <a:latin typeface="Georgia"/>
               </a:rPr>
               <a:t>What they found</a:t>
             </a:r>
@@ -16322,11 +15174,11 @@
           <a:p>
             <a:pPr algn="ctr"/>
             <a:r>
-              <a:rPr sz="5200" b="1">
+              <a:rPr sz="5200" b="0">
                 <a:solidFill>
                   <a:srgbClr val="6B4F3E"/>
                 </a:solidFill>
-                <a:latin typeface="Libre Caslon Display"/>
+                <a:latin typeface="Georgia"/>
               </a:rPr>
               <a:t>19%</a:t>
             </a:r>
@@ -16366,7 +15218,7 @@
                 <a:solidFill>
                   <a:srgbClr val="706962"/>
                 </a:solidFill>
-                <a:latin typeface="Karla"/>
+                <a:latin typeface="Calibri"/>
               </a:rPr>
               <a:t>of the 306 moments had somebody step in. Four out of five had nobody.</a:t>
             </a:r>
@@ -16444,11 +15296,11 @@
           <a:p>
             <a:pPr algn="ctr"/>
             <a:r>
-              <a:rPr sz="5200" b="1">
+              <a:rPr sz="5200" b="0">
                 <a:solidFill>
                   <a:srgbClr val="6B4F3E"/>
                 </a:solidFill>
-                <a:latin typeface="Libre Caslon Display"/>
+                <a:latin typeface="Georgia"/>
               </a:rPr>
               <a:t>57%</a:t>
             </a:r>
@@ -16488,7 +15340,7 @@
                 <a:solidFill>
                   <a:srgbClr val="706962"/>
                 </a:solidFill>
-                <a:latin typeface="Karla"/>
+                <a:latin typeface="Calibri"/>
               </a:rPr>
               <a:t>of the times somebody did step in, it stopped within ten seconds.</a:t>
             </a:r>
@@ -16528,7 +15380,7 @@
                 <a:solidFill>
                   <a:srgbClr val="6B4F3E"/>
                 </a:solidFill>
-                <a:latin typeface="Karla"/>
+                <a:latin typeface="Calibri"/>
               </a:rPr>
               <a:t>Stepping in is rare, and more than half the time it works within ten seconds.</a:t>
             </a:r>
@@ -16568,7 +15420,7 @@
                 <a:solidFill>
                   <a:srgbClr val="706962"/>
                 </a:solidFill>
-                <a:latin typeface="Karla"/>
+                <a:latin typeface="Calibri"/>
               </a:rPr>
               <a:t>These were younger students, on a playground, in 2001. Whether it holds here is worth arguing about.</a:t>
             </a:r>
@@ -16628,7 +15480,7 @@
                 <a:solidFill>
                   <a:srgbClr val="AAA49D"/>
                 </a:solidFill>
-                <a:latin typeface="Karla"/>
+                <a:latin typeface="Calibri"/>
               </a:rPr>
               <a:t>The Pastoral Guide</a:t>
             </a:r>
@@ -16664,7 +15516,7 @@
                 <a:solidFill>
                   <a:srgbClr val="AAA49D"/>
                 </a:solidFill>
-                <a:latin typeface="Karla"/>
+                <a:latin typeface="Calibri"/>
               </a:rPr>
               <a:t>9 / 18</a:t>
             </a:r>

--- a/tutor-time/bystander-to-upstander/downloads/Bystander_to_Upstander.pptx
+++ b/tutor-time/bystander-to-upstander/downloads/Bystander_to_Upstander.pptx
@@ -3288,7 +3288,7 @@
                 </a:solidFill>
                 <a:latin typeface="Calibri"/>
               </a:rPr>
-              <a:t>Most of the people in a moment like this think they are not in it.</a:t>
+              <a:t>Who is part of it when somebody is picked on, and what you can do.</a:t>
             </a:r>
           </a:p>
         </p:txBody>
